--- a/deep_learning/fine_tuning/1-FineTuning.pptx
+++ b/deep_learning/fine_tuning/1-FineTuning.pptx
@@ -5,28 +5,29 @@
     <p:sldMasterId id="2147483648" r:id="rId1"/>
   </p:sldMasterIdLst>
   <p:notesMasterIdLst>
-    <p:notesMasterId r:id="rId18"/>
+    <p:notesMasterId r:id="rId19"/>
   </p:notesMasterIdLst>
   <p:handoutMasterIdLst>
-    <p:handoutMasterId r:id="rId19"/>
+    <p:handoutMasterId r:id="rId20"/>
   </p:handoutMasterIdLst>
   <p:sldIdLst>
     <p:sldId id="257" r:id="rId2"/>
     <p:sldId id="276" r:id="rId3"/>
-    <p:sldId id="277" r:id="rId4"/>
-    <p:sldId id="286" r:id="rId5"/>
-    <p:sldId id="295" r:id="rId6"/>
-    <p:sldId id="287" r:id="rId7"/>
-    <p:sldId id="289" r:id="rId8"/>
-    <p:sldId id="278" r:id="rId9"/>
-    <p:sldId id="288" r:id="rId10"/>
-    <p:sldId id="279" r:id="rId11"/>
-    <p:sldId id="294" r:id="rId12"/>
-    <p:sldId id="292" r:id="rId13"/>
-    <p:sldId id="293" r:id="rId14"/>
-    <p:sldId id="291" r:id="rId15"/>
-    <p:sldId id="290" r:id="rId16"/>
-    <p:sldId id="275" r:id="rId17"/>
+    <p:sldId id="296" r:id="rId4"/>
+    <p:sldId id="277" r:id="rId5"/>
+    <p:sldId id="286" r:id="rId6"/>
+    <p:sldId id="295" r:id="rId7"/>
+    <p:sldId id="287" r:id="rId8"/>
+    <p:sldId id="289" r:id="rId9"/>
+    <p:sldId id="278" r:id="rId10"/>
+    <p:sldId id="288" r:id="rId11"/>
+    <p:sldId id="279" r:id="rId12"/>
+    <p:sldId id="294" r:id="rId13"/>
+    <p:sldId id="292" r:id="rId14"/>
+    <p:sldId id="293" r:id="rId15"/>
+    <p:sldId id="291" r:id="rId16"/>
+    <p:sldId id="290" r:id="rId17"/>
+    <p:sldId id="275" r:id="rId18"/>
   </p:sldIdLst>
   <p:sldSz cx="12192000" cy="6858000"/>
   <p:notesSz cx="6858000" cy="9144000"/>
@@ -230,7 +231,7 @@
           <a:p>
             <a:fld id="{7BAEECA8-D063-486F-AE31-5020270C1449}" type="datetimeFigureOut">
               <a:rPr lang="en-US" smtClean="0"/>
-              <a:t>6/10/2026</a:t>
+              <a:t>9/17/2026</a:t>
             </a:fld>
             <a:endParaRPr lang="en-US"/>
           </a:p>
@@ -2479,7 +2480,7 @@
           <a:p>
             <a:fld id="{CB233BD1-3BA8-448D-9D08-7846095EA517}" type="datetimeFigureOut">
               <a:rPr lang="en-US" smtClean="0"/>
-              <a:t>6/10/2026</a:t>
+              <a:t>9/17/2026</a:t>
             </a:fld>
             <a:endParaRPr lang="en-US"/>
           </a:p>
@@ -2893,7 +2894,7 @@
           <a:p>
             <a:fld id="{6383FAE1-13DE-4511-8C1B-C8AFB720664C}" type="datetimeFigureOut">
               <a:rPr lang="en-US" smtClean="0"/>
-              <a:t>6/10/2026</a:t>
+              <a:t>9/17/2026</a:t>
             </a:fld>
             <a:endParaRPr lang="en-US"/>
           </a:p>
@@ -3091,7 +3092,7 @@
           <a:p>
             <a:fld id="{6383FAE1-13DE-4511-8C1B-C8AFB720664C}" type="datetimeFigureOut">
               <a:rPr lang="en-US" smtClean="0"/>
-              <a:t>6/10/2026</a:t>
+              <a:t>9/17/2026</a:t>
             </a:fld>
             <a:endParaRPr lang="en-US"/>
           </a:p>
@@ -3299,7 +3300,7 @@
           <a:p>
             <a:fld id="{6383FAE1-13DE-4511-8C1B-C8AFB720664C}" type="datetimeFigureOut">
               <a:rPr lang="en-US" smtClean="0"/>
-              <a:t>6/10/2026</a:t>
+              <a:t>9/17/2026</a:t>
             </a:fld>
             <a:endParaRPr lang="en-US"/>
           </a:p>
@@ -3497,7 +3498,7 @@
           <a:p>
             <a:fld id="{6383FAE1-13DE-4511-8C1B-C8AFB720664C}" type="datetimeFigureOut">
               <a:rPr lang="en-US" smtClean="0"/>
-              <a:t>6/10/2026</a:t>
+              <a:t>9/17/2026</a:t>
             </a:fld>
             <a:endParaRPr lang="en-US"/>
           </a:p>
@@ -3772,7 +3773,7 @@
           <a:p>
             <a:fld id="{6383FAE1-13DE-4511-8C1B-C8AFB720664C}" type="datetimeFigureOut">
               <a:rPr lang="en-US" smtClean="0"/>
-              <a:t>6/10/2026</a:t>
+              <a:t>9/17/2026</a:t>
             </a:fld>
             <a:endParaRPr lang="en-US"/>
           </a:p>
@@ -4037,7 +4038,7 @@
           <a:p>
             <a:fld id="{6383FAE1-13DE-4511-8C1B-C8AFB720664C}" type="datetimeFigureOut">
               <a:rPr lang="en-US" smtClean="0"/>
-              <a:t>6/10/2026</a:t>
+              <a:t>9/17/2026</a:t>
             </a:fld>
             <a:endParaRPr lang="en-US"/>
           </a:p>
@@ -4449,7 +4450,7 @@
           <a:p>
             <a:fld id="{6383FAE1-13DE-4511-8C1B-C8AFB720664C}" type="datetimeFigureOut">
               <a:rPr lang="en-US" smtClean="0"/>
-              <a:t>6/10/2026</a:t>
+              <a:t>9/17/2026</a:t>
             </a:fld>
             <a:endParaRPr lang="en-US"/>
           </a:p>
@@ -4590,7 +4591,7 @@
           <a:p>
             <a:fld id="{6383FAE1-13DE-4511-8C1B-C8AFB720664C}" type="datetimeFigureOut">
               <a:rPr lang="en-US" smtClean="0"/>
-              <a:t>6/10/2026</a:t>
+              <a:t>9/17/2026</a:t>
             </a:fld>
             <a:endParaRPr lang="en-US"/>
           </a:p>
@@ -4703,7 +4704,7 @@
           <a:p>
             <a:fld id="{6383FAE1-13DE-4511-8C1B-C8AFB720664C}" type="datetimeFigureOut">
               <a:rPr lang="en-US" smtClean="0"/>
-              <a:t>6/10/2026</a:t>
+              <a:t>9/17/2026</a:t>
             </a:fld>
             <a:endParaRPr lang="en-US"/>
           </a:p>
@@ -5014,7 +5015,7 @@
           <a:p>
             <a:fld id="{6383FAE1-13DE-4511-8C1B-C8AFB720664C}" type="datetimeFigureOut">
               <a:rPr lang="en-US" smtClean="0"/>
-              <a:t>6/10/2026</a:t>
+              <a:t>9/17/2026</a:t>
             </a:fld>
             <a:endParaRPr lang="en-US"/>
           </a:p>
@@ -5305,7 +5306,7 @@
           <a:p>
             <a:fld id="{6383FAE1-13DE-4511-8C1B-C8AFB720664C}" type="datetimeFigureOut">
               <a:rPr lang="en-US" smtClean="0"/>
-              <a:t>6/10/2026</a:t>
+              <a:t>9/17/2026</a:t>
             </a:fld>
             <a:endParaRPr lang="en-US"/>
           </a:p>
@@ -5549,7 +5550,7 @@
           <a:p>
             <a:fld id="{6383FAE1-13DE-4511-8C1B-C8AFB720664C}" type="datetimeFigureOut">
               <a:rPr lang="en-US" smtClean="0"/>
-              <a:t>6/10/2026</a:t>
+              <a:t>9/17/2026</a:t>
             </a:fld>
             <a:endParaRPr lang="en-US"/>
           </a:p>
@@ -6167,6 +6168,799 @@
 </file>
 
 <file path=ppt/slides/slide10.xml><?xml version="1.0" encoding="utf-8"?>
+<p:sld xmlns:a="http://schemas.openxmlformats.org/drawingml/2006/main" xmlns:r="http://schemas.openxmlformats.org/officeDocument/2006/relationships" xmlns:p="http://schemas.openxmlformats.org/presentationml/2006/main">
+  <p:cSld>
+    <p:spTree>
+      <p:nvGrpSpPr>
+        <p:cNvPr id="1" name="">
+          <a:extLst>
+            <a:ext uri="{FF2B5EF4-FFF2-40B4-BE49-F238E27FC236}">
+              <a16:creationId xmlns:a16="http://schemas.microsoft.com/office/drawing/2014/main" id="{D9F28F00-DEAD-79BD-8CA3-0A7C12A5A801}"/>
+            </a:ext>
+          </a:extLst>
+        </p:cNvPr>
+        <p:cNvGrpSpPr/>
+        <p:nvPr/>
+      </p:nvGrpSpPr>
+      <p:grpSpPr>
+        <a:xfrm>
+          <a:off x="0" y="0"/>
+          <a:ext cx="0" cy="0"/>
+          <a:chOff x="0" y="0"/>
+          <a:chExt cx="0" cy="0"/>
+        </a:xfrm>
+      </p:grpSpPr>
+      <p:sp>
+        <p:nvSpPr>
+          <p:cNvPr id="9" name="TextBox 8">
+            <a:extLst>
+              <a:ext uri="{FF2B5EF4-FFF2-40B4-BE49-F238E27FC236}">
+                <a16:creationId xmlns:a16="http://schemas.microsoft.com/office/drawing/2014/main" id="{A8C3F698-F21B-1D92-2FAA-F6B2AC2CD1A4}"/>
+              </a:ext>
+            </a:extLst>
+          </p:cNvPr>
+          <p:cNvSpPr txBox="1"/>
+          <p:nvPr/>
+        </p:nvSpPr>
+        <p:spPr>
+          <a:xfrm>
+            <a:off x="148336" y="199104"/>
+            <a:ext cx="10292080" cy="830997"/>
+          </a:xfrm>
+          <a:prstGeom prst="rect">
+            <a:avLst/>
+          </a:prstGeom>
+          <a:noFill/>
+        </p:spPr>
+        <p:txBody>
+          <a:bodyPr wrap="square">
+            <a:spAutoFit/>
+          </a:bodyPr>
+          <a:lstStyle/>
+          <a:p>
+            <a:r>
+              <a:rPr lang="en-US" sz="2400" dirty="0">
+                <a:solidFill>
+                  <a:schemeClr val="accent6">
+                    <a:lumMod val="60000"/>
+                    <a:lumOff val="40000"/>
+                  </a:schemeClr>
+                </a:solidFill>
+              </a:rPr>
+              <a:t>NOTE: </a:t>
+            </a:r>
+          </a:p>
+          <a:p>
+            <a:r>
+              <a:rPr lang="en-US" sz="2400" dirty="0">
+                <a:solidFill>
+                  <a:schemeClr val="accent6">
+                    <a:lumMod val="60000"/>
+                    <a:lumOff val="40000"/>
+                  </a:schemeClr>
+                </a:solidFill>
+              </a:rPr>
+              <a:t>A </a:t>
+            </a:r>
+            <a:r>
+              <a:rPr lang="en-US" sz="2400" b="1" dirty="0">
+                <a:solidFill>
+                  <a:schemeClr val="accent6">
+                    <a:lumMod val="60000"/>
+                    <a:lumOff val="40000"/>
+                  </a:schemeClr>
+                </a:solidFill>
+              </a:rPr>
+              <a:t>smaller fine-tuned</a:t>
+            </a:r>
+            <a:r>
+              <a:rPr lang="en-US" sz="2400" dirty="0">
+                <a:solidFill>
+                  <a:schemeClr val="accent6">
+                    <a:lumMod val="60000"/>
+                    <a:lumOff val="40000"/>
+                  </a:schemeClr>
+                </a:solidFill>
+              </a:rPr>
+              <a:t> model can outperform the larger base model</a:t>
+            </a:r>
+          </a:p>
+        </p:txBody>
+      </p:sp>
+      <p:sp>
+        <p:nvSpPr>
+          <p:cNvPr id="7" name="Freeform: Shape 6">
+            <a:extLst>
+              <a:ext uri="{FF2B5EF4-FFF2-40B4-BE49-F238E27FC236}">
+                <a16:creationId xmlns:a16="http://schemas.microsoft.com/office/drawing/2014/main" id="{D5F35BEC-DA0B-C59D-411D-689965933345}"/>
+              </a:ext>
+            </a:extLst>
+          </p:cNvPr>
+          <p:cNvSpPr/>
+          <p:nvPr/>
+        </p:nvSpPr>
+        <p:spPr>
+          <a:xfrm>
+            <a:off x="274320" y="2889504"/>
+            <a:ext cx="4078224" cy="2990088"/>
+          </a:xfrm>
+          <a:custGeom>
+            <a:avLst/>
+            <a:gdLst>
+              <a:gd name="csX0" fmla="*/ 813816 w 1618488"/>
+              <a:gd name="csY0" fmla="*/ 54864 h 1472184"/>
+              <a:gd name="csX1" fmla="*/ 713232 w 1618488"/>
+              <a:gd name="csY1" fmla="*/ 18288 h 1472184"/>
+              <a:gd name="csX2" fmla="*/ 603504 w 1618488"/>
+              <a:gd name="csY2" fmla="*/ 9144 h 1472184"/>
+              <a:gd name="csX3" fmla="*/ 393192 w 1618488"/>
+              <a:gd name="csY3" fmla="*/ 27432 h 1472184"/>
+              <a:gd name="csX4" fmla="*/ 310896 w 1618488"/>
+              <a:gd name="csY4" fmla="*/ 64008 h 1472184"/>
+              <a:gd name="csX5" fmla="*/ 228600 w 1618488"/>
+              <a:gd name="csY5" fmla="*/ 118872 h 1472184"/>
+              <a:gd name="csX6" fmla="*/ 182880 w 1618488"/>
+              <a:gd name="csY6" fmla="*/ 164592 h 1472184"/>
+              <a:gd name="csX7" fmla="*/ 91440 w 1618488"/>
+              <a:gd name="csY7" fmla="*/ 301752 h 1472184"/>
+              <a:gd name="csX8" fmla="*/ 27432 w 1618488"/>
+              <a:gd name="csY8" fmla="*/ 502920 h 1472184"/>
+              <a:gd name="csX9" fmla="*/ 18288 w 1618488"/>
+              <a:gd name="csY9" fmla="*/ 594360 h 1472184"/>
+              <a:gd name="csX10" fmla="*/ 0 w 1618488"/>
+              <a:gd name="csY10" fmla="*/ 841248 h 1472184"/>
+              <a:gd name="csX11" fmla="*/ 36576 w 1618488"/>
+              <a:gd name="csY11" fmla="*/ 1106424 h 1472184"/>
+              <a:gd name="csX12" fmla="*/ 64008 w 1618488"/>
+              <a:gd name="csY12" fmla="*/ 1179576 h 1472184"/>
+              <a:gd name="csX13" fmla="*/ 118872 w 1618488"/>
+              <a:gd name="csY13" fmla="*/ 1243584 h 1472184"/>
+              <a:gd name="csX14" fmla="*/ 283464 w 1618488"/>
+              <a:gd name="csY14" fmla="*/ 1362456 h 1472184"/>
+              <a:gd name="csX15" fmla="*/ 484632 w 1618488"/>
+              <a:gd name="csY15" fmla="*/ 1444752 h 1472184"/>
+              <a:gd name="csX16" fmla="*/ 722376 w 1618488"/>
+              <a:gd name="csY16" fmla="*/ 1472184 h 1472184"/>
+              <a:gd name="csX17" fmla="*/ 877824 w 1618488"/>
+              <a:gd name="csY17" fmla="*/ 1453896 h 1472184"/>
+              <a:gd name="csX18" fmla="*/ 996696 w 1618488"/>
+              <a:gd name="csY18" fmla="*/ 1408176 h 1472184"/>
+              <a:gd name="csX19" fmla="*/ 1051560 w 1618488"/>
+              <a:gd name="csY19" fmla="*/ 1353312 h 1472184"/>
+              <a:gd name="csX20" fmla="*/ 1152144 w 1618488"/>
+              <a:gd name="csY20" fmla="*/ 1271016 h 1472184"/>
+              <a:gd name="csX21" fmla="*/ 1298448 w 1618488"/>
+              <a:gd name="csY21" fmla="*/ 1243584 h 1472184"/>
+              <a:gd name="csX22" fmla="*/ 1490472 w 1618488"/>
+              <a:gd name="csY22" fmla="*/ 1207008 h 1472184"/>
+              <a:gd name="csX23" fmla="*/ 1563624 w 1618488"/>
+              <a:gd name="csY23" fmla="*/ 1152144 h 1472184"/>
+              <a:gd name="csX24" fmla="*/ 1618488 w 1618488"/>
+              <a:gd name="csY24" fmla="*/ 1005840 h 1472184"/>
+              <a:gd name="csX25" fmla="*/ 1572768 w 1618488"/>
+              <a:gd name="csY25" fmla="*/ 877824 h 1472184"/>
+              <a:gd name="csX26" fmla="*/ 1517904 w 1618488"/>
+              <a:gd name="csY26" fmla="*/ 804672 h 1472184"/>
+              <a:gd name="csX27" fmla="*/ 1362456 w 1618488"/>
+              <a:gd name="csY27" fmla="*/ 667512 h 1472184"/>
+              <a:gd name="csX28" fmla="*/ 1289304 w 1618488"/>
+              <a:gd name="csY28" fmla="*/ 603504 h 1472184"/>
+              <a:gd name="csX29" fmla="*/ 1197864 w 1618488"/>
+              <a:gd name="csY29" fmla="*/ 493776 h 1472184"/>
+              <a:gd name="csX30" fmla="*/ 1106424 w 1618488"/>
+              <a:gd name="csY30" fmla="*/ 402336 h 1472184"/>
+              <a:gd name="csX31" fmla="*/ 1088136 w 1618488"/>
+              <a:gd name="csY31" fmla="*/ 356616 h 1472184"/>
+              <a:gd name="csX32" fmla="*/ 1051560 w 1618488"/>
+              <a:gd name="csY32" fmla="*/ 283464 h 1472184"/>
+              <a:gd name="csX33" fmla="*/ 1042416 w 1618488"/>
+              <a:gd name="csY33" fmla="*/ 246888 h 1472184"/>
+              <a:gd name="csX34" fmla="*/ 987552 w 1618488"/>
+              <a:gd name="csY34" fmla="*/ 164592 h 1472184"/>
+              <a:gd name="csX35" fmla="*/ 969264 w 1618488"/>
+              <a:gd name="csY35" fmla="*/ 137160 h 1472184"/>
+              <a:gd name="csX36" fmla="*/ 932688 w 1618488"/>
+              <a:gd name="csY36" fmla="*/ 91440 h 1472184"/>
+              <a:gd name="csX37" fmla="*/ 914400 w 1618488"/>
+              <a:gd name="csY37" fmla="*/ 64008 h 1472184"/>
+              <a:gd name="csX38" fmla="*/ 850392 w 1618488"/>
+              <a:gd name="csY38" fmla="*/ 9144 h 1472184"/>
+              <a:gd name="csX39" fmla="*/ 822960 w 1618488"/>
+              <a:gd name="csY39" fmla="*/ 0 h 1472184"/>
+              <a:gd name="csX40" fmla="*/ 795528 w 1618488"/>
+              <a:gd name="csY40" fmla="*/ 9144 h 1472184"/>
+              <a:gd name="csX41" fmla="*/ 740664 w 1618488"/>
+              <a:gd name="csY41" fmla="*/ 18288 h 1472184"/>
+              <a:gd name="csX42" fmla="*/ 694944 w 1618488"/>
+              <a:gd name="csY42" fmla="*/ 27432 h 1472184"/>
+              <a:gd name="csX43" fmla="*/ 749808 w 1618488"/>
+              <a:gd name="csY43" fmla="*/ 45720 h 1472184"/>
+              <a:gd name="csX44" fmla="*/ 813816 w 1618488"/>
+              <a:gd name="csY44" fmla="*/ 54864 h 1472184"/>
+            </a:gdLst>
+            <a:ahLst/>
+            <a:cxnLst>
+              <a:cxn ang="0">
+                <a:pos x="csX0" y="csY0"/>
+              </a:cxn>
+              <a:cxn ang="0">
+                <a:pos x="csX1" y="csY1"/>
+              </a:cxn>
+              <a:cxn ang="0">
+                <a:pos x="csX2" y="csY2"/>
+              </a:cxn>
+              <a:cxn ang="0">
+                <a:pos x="csX3" y="csY3"/>
+              </a:cxn>
+              <a:cxn ang="0">
+                <a:pos x="csX4" y="csY4"/>
+              </a:cxn>
+              <a:cxn ang="0">
+                <a:pos x="csX5" y="csY5"/>
+              </a:cxn>
+              <a:cxn ang="0">
+                <a:pos x="csX6" y="csY6"/>
+              </a:cxn>
+              <a:cxn ang="0">
+                <a:pos x="csX7" y="csY7"/>
+              </a:cxn>
+              <a:cxn ang="0">
+                <a:pos x="csX8" y="csY8"/>
+              </a:cxn>
+              <a:cxn ang="0">
+                <a:pos x="csX9" y="csY9"/>
+              </a:cxn>
+              <a:cxn ang="0">
+                <a:pos x="csX10" y="csY10"/>
+              </a:cxn>
+              <a:cxn ang="0">
+                <a:pos x="csX11" y="csY11"/>
+              </a:cxn>
+              <a:cxn ang="0">
+                <a:pos x="csX12" y="csY12"/>
+              </a:cxn>
+              <a:cxn ang="0">
+                <a:pos x="csX13" y="csY13"/>
+              </a:cxn>
+              <a:cxn ang="0">
+                <a:pos x="csX14" y="csY14"/>
+              </a:cxn>
+              <a:cxn ang="0">
+                <a:pos x="csX15" y="csY15"/>
+              </a:cxn>
+              <a:cxn ang="0">
+                <a:pos x="csX16" y="csY16"/>
+              </a:cxn>
+              <a:cxn ang="0">
+                <a:pos x="csX17" y="csY17"/>
+              </a:cxn>
+              <a:cxn ang="0">
+                <a:pos x="csX18" y="csY18"/>
+              </a:cxn>
+              <a:cxn ang="0">
+                <a:pos x="csX19" y="csY19"/>
+              </a:cxn>
+              <a:cxn ang="0">
+                <a:pos x="csX20" y="csY20"/>
+              </a:cxn>
+              <a:cxn ang="0">
+                <a:pos x="csX21" y="csY21"/>
+              </a:cxn>
+              <a:cxn ang="0">
+                <a:pos x="csX22" y="csY22"/>
+              </a:cxn>
+              <a:cxn ang="0">
+                <a:pos x="csX23" y="csY23"/>
+              </a:cxn>
+              <a:cxn ang="0">
+                <a:pos x="csX24" y="csY24"/>
+              </a:cxn>
+              <a:cxn ang="0">
+                <a:pos x="csX25" y="csY25"/>
+              </a:cxn>
+              <a:cxn ang="0">
+                <a:pos x="csX26" y="csY26"/>
+              </a:cxn>
+              <a:cxn ang="0">
+                <a:pos x="csX27" y="csY27"/>
+              </a:cxn>
+              <a:cxn ang="0">
+                <a:pos x="csX28" y="csY28"/>
+              </a:cxn>
+              <a:cxn ang="0">
+                <a:pos x="csX29" y="csY29"/>
+              </a:cxn>
+              <a:cxn ang="0">
+                <a:pos x="csX30" y="csY30"/>
+              </a:cxn>
+              <a:cxn ang="0">
+                <a:pos x="csX31" y="csY31"/>
+              </a:cxn>
+              <a:cxn ang="0">
+                <a:pos x="csX32" y="csY32"/>
+              </a:cxn>
+              <a:cxn ang="0">
+                <a:pos x="csX33" y="csY33"/>
+              </a:cxn>
+              <a:cxn ang="0">
+                <a:pos x="csX34" y="csY34"/>
+              </a:cxn>
+              <a:cxn ang="0">
+                <a:pos x="csX35" y="csY35"/>
+              </a:cxn>
+              <a:cxn ang="0">
+                <a:pos x="csX36" y="csY36"/>
+              </a:cxn>
+              <a:cxn ang="0">
+                <a:pos x="csX37" y="csY37"/>
+              </a:cxn>
+              <a:cxn ang="0">
+                <a:pos x="csX38" y="csY38"/>
+              </a:cxn>
+              <a:cxn ang="0">
+                <a:pos x="csX39" y="csY39"/>
+              </a:cxn>
+              <a:cxn ang="0">
+                <a:pos x="csX40" y="csY40"/>
+              </a:cxn>
+              <a:cxn ang="0">
+                <a:pos x="csX41" y="csY41"/>
+              </a:cxn>
+              <a:cxn ang="0">
+                <a:pos x="csX42" y="csY42"/>
+              </a:cxn>
+              <a:cxn ang="0">
+                <a:pos x="csX43" y="csY43"/>
+              </a:cxn>
+              <a:cxn ang="0">
+                <a:pos x="csX44" y="csY44"/>
+              </a:cxn>
+            </a:cxnLst>
+            <a:rect l="l" t="t" r="r" b="b"/>
+            <a:pathLst>
+              <a:path w="1618488" h="1472184">
+                <a:moveTo>
+                  <a:pt x="813816" y="54864"/>
+                </a:moveTo>
+                <a:cubicBezTo>
+                  <a:pt x="807720" y="50292"/>
+                  <a:pt x="733356" y="21642"/>
+                  <a:pt x="713232" y="18288"/>
+                </a:cubicBezTo>
+                <a:cubicBezTo>
+                  <a:pt x="677029" y="12254"/>
+                  <a:pt x="640080" y="12192"/>
+                  <a:pt x="603504" y="9144"/>
+                </a:cubicBezTo>
+                <a:cubicBezTo>
+                  <a:pt x="533400" y="15240"/>
+                  <a:pt x="462355" y="14464"/>
+                  <a:pt x="393192" y="27432"/>
+                </a:cubicBezTo>
+                <a:cubicBezTo>
+                  <a:pt x="363687" y="32964"/>
+                  <a:pt x="337138" y="49429"/>
+                  <a:pt x="310896" y="64008"/>
+                </a:cubicBezTo>
+                <a:cubicBezTo>
+                  <a:pt x="282076" y="80019"/>
+                  <a:pt x="254524" y="98503"/>
+                  <a:pt x="228600" y="118872"/>
+                </a:cubicBezTo>
+                <a:cubicBezTo>
+                  <a:pt x="211653" y="132188"/>
+                  <a:pt x="197378" y="148644"/>
+                  <a:pt x="182880" y="164592"/>
+                </a:cubicBezTo>
+                <a:cubicBezTo>
+                  <a:pt x="139283" y="212548"/>
+                  <a:pt x="119439" y="239531"/>
+                  <a:pt x="91440" y="301752"/>
+                </a:cubicBezTo>
+                <a:cubicBezTo>
+                  <a:pt x="60691" y="370082"/>
+                  <a:pt x="47005" y="431151"/>
+                  <a:pt x="27432" y="502920"/>
+                </a:cubicBezTo>
+                <a:cubicBezTo>
+                  <a:pt x="24384" y="533400"/>
+                  <a:pt x="20396" y="563801"/>
+                  <a:pt x="18288" y="594360"/>
+                </a:cubicBezTo>
+                <a:cubicBezTo>
+                  <a:pt x="628" y="850433"/>
+                  <a:pt x="19398" y="686061"/>
+                  <a:pt x="0" y="841248"/>
+                </a:cubicBezTo>
+                <a:cubicBezTo>
+                  <a:pt x="9630" y="1033853"/>
+                  <a:pt x="-9704" y="975298"/>
+                  <a:pt x="36576" y="1106424"/>
+                </a:cubicBezTo>
+                <a:cubicBezTo>
+                  <a:pt x="45243" y="1130981"/>
+                  <a:pt x="50609" y="1157245"/>
+                  <a:pt x="64008" y="1179576"/>
+                </a:cubicBezTo>
+                <a:cubicBezTo>
+                  <a:pt x="78466" y="1203673"/>
+                  <a:pt x="99001" y="1223713"/>
+                  <a:pt x="118872" y="1243584"/>
+                </a:cubicBezTo>
+                <a:cubicBezTo>
+                  <a:pt x="168419" y="1293131"/>
+                  <a:pt x="219484" y="1332465"/>
+                  <a:pt x="283464" y="1362456"/>
+                </a:cubicBezTo>
+                <a:cubicBezTo>
+                  <a:pt x="349065" y="1393206"/>
+                  <a:pt x="413024" y="1433735"/>
+                  <a:pt x="484632" y="1444752"/>
+                </a:cubicBezTo>
+                <a:cubicBezTo>
+                  <a:pt x="642783" y="1469083"/>
+                  <a:pt x="563532" y="1459965"/>
+                  <a:pt x="722376" y="1472184"/>
+                </a:cubicBezTo>
+                <a:cubicBezTo>
+                  <a:pt x="774192" y="1466088"/>
+                  <a:pt x="826422" y="1462835"/>
+                  <a:pt x="877824" y="1453896"/>
+                </a:cubicBezTo>
+                <a:cubicBezTo>
+                  <a:pt x="906578" y="1448895"/>
+                  <a:pt x="972928" y="1418362"/>
+                  <a:pt x="996696" y="1408176"/>
+                </a:cubicBezTo>
+                <a:cubicBezTo>
+                  <a:pt x="1014984" y="1389888"/>
+                  <a:pt x="1034163" y="1372449"/>
+                  <a:pt x="1051560" y="1353312"/>
+                </a:cubicBezTo>
+                <a:cubicBezTo>
+                  <a:pt x="1091695" y="1309164"/>
+                  <a:pt x="1086039" y="1291135"/>
+                  <a:pt x="1152144" y="1271016"/>
+                </a:cubicBezTo>
+                <a:cubicBezTo>
+                  <a:pt x="1199612" y="1256569"/>
+                  <a:pt x="1249552" y="1252014"/>
+                  <a:pt x="1298448" y="1243584"/>
+                </a:cubicBezTo>
+                <a:cubicBezTo>
+                  <a:pt x="1476555" y="1212876"/>
+                  <a:pt x="1356864" y="1240410"/>
+                  <a:pt x="1490472" y="1207008"/>
+                </a:cubicBezTo>
+                <a:cubicBezTo>
+                  <a:pt x="1514856" y="1188720"/>
+                  <a:pt x="1542950" y="1174541"/>
+                  <a:pt x="1563624" y="1152144"/>
+                </a:cubicBezTo>
+                <a:cubicBezTo>
+                  <a:pt x="1604285" y="1108095"/>
+                  <a:pt x="1606141" y="1061400"/>
+                  <a:pt x="1618488" y="1005840"/>
+                </a:cubicBezTo>
+                <a:cubicBezTo>
+                  <a:pt x="1603248" y="963168"/>
+                  <a:pt x="1593032" y="918352"/>
+                  <a:pt x="1572768" y="877824"/>
+                </a:cubicBezTo>
+                <a:cubicBezTo>
+                  <a:pt x="1559137" y="850562"/>
+                  <a:pt x="1537975" y="827611"/>
+                  <a:pt x="1517904" y="804672"/>
+                </a:cubicBezTo>
+                <a:cubicBezTo>
+                  <a:pt x="1448328" y="725156"/>
+                  <a:pt x="1443603" y="734339"/>
+                  <a:pt x="1362456" y="667512"/>
+                </a:cubicBezTo>
+                <a:cubicBezTo>
+                  <a:pt x="1337445" y="646915"/>
+                  <a:pt x="1313047" y="625551"/>
+                  <a:pt x="1289304" y="603504"/>
+                </a:cubicBezTo>
+                <a:cubicBezTo>
+                  <a:pt x="1142500" y="467186"/>
+                  <a:pt x="1313712" y="626174"/>
+                  <a:pt x="1197864" y="493776"/>
+                </a:cubicBezTo>
+                <a:cubicBezTo>
+                  <a:pt x="1169479" y="461336"/>
+                  <a:pt x="1106424" y="402336"/>
+                  <a:pt x="1106424" y="402336"/>
+                </a:cubicBezTo>
+                <a:cubicBezTo>
+                  <a:pt x="1100328" y="387096"/>
+                  <a:pt x="1095014" y="371519"/>
+                  <a:pt x="1088136" y="356616"/>
+                </a:cubicBezTo>
+                <a:cubicBezTo>
+                  <a:pt x="1076712" y="331863"/>
+                  <a:pt x="1058172" y="309912"/>
+                  <a:pt x="1051560" y="283464"/>
+                </a:cubicBezTo>
+                <a:cubicBezTo>
+                  <a:pt x="1048512" y="271272"/>
+                  <a:pt x="1047520" y="258372"/>
+                  <a:pt x="1042416" y="246888"/>
+                </a:cubicBezTo>
+                <a:cubicBezTo>
+                  <a:pt x="1027866" y="214149"/>
+                  <a:pt x="1007878" y="193049"/>
+                  <a:pt x="987552" y="164592"/>
+                </a:cubicBezTo>
+                <a:cubicBezTo>
+                  <a:pt x="981164" y="155649"/>
+                  <a:pt x="975858" y="145952"/>
+                  <a:pt x="969264" y="137160"/>
+                </a:cubicBezTo>
+                <a:cubicBezTo>
+                  <a:pt x="957554" y="121547"/>
+                  <a:pt x="944398" y="107053"/>
+                  <a:pt x="932688" y="91440"/>
+                </a:cubicBezTo>
+                <a:cubicBezTo>
+                  <a:pt x="926094" y="82648"/>
+                  <a:pt x="921552" y="72352"/>
+                  <a:pt x="914400" y="64008"/>
+                </a:cubicBezTo>
+                <a:cubicBezTo>
+                  <a:pt x="897527" y="44322"/>
+                  <a:pt x="874659" y="21278"/>
+                  <a:pt x="850392" y="9144"/>
+                </a:cubicBezTo>
+                <a:cubicBezTo>
+                  <a:pt x="841771" y="4833"/>
+                  <a:pt x="832104" y="3048"/>
+                  <a:pt x="822960" y="0"/>
+                </a:cubicBezTo>
+                <a:cubicBezTo>
+                  <a:pt x="813816" y="3048"/>
+                  <a:pt x="804937" y="7053"/>
+                  <a:pt x="795528" y="9144"/>
+                </a:cubicBezTo>
+                <a:cubicBezTo>
+                  <a:pt x="777429" y="13166"/>
+                  <a:pt x="758905" y="14971"/>
+                  <a:pt x="740664" y="18288"/>
+                </a:cubicBezTo>
+                <a:cubicBezTo>
+                  <a:pt x="725373" y="21068"/>
+                  <a:pt x="710184" y="24384"/>
+                  <a:pt x="694944" y="27432"/>
+                </a:cubicBezTo>
+                <a:cubicBezTo>
+                  <a:pt x="713232" y="33528"/>
+                  <a:pt x="731106" y="41045"/>
+                  <a:pt x="749808" y="45720"/>
+                </a:cubicBezTo>
+                <a:cubicBezTo>
+                  <a:pt x="792996" y="56517"/>
+                  <a:pt x="819912" y="59436"/>
+                  <a:pt x="813816" y="54864"/>
+                </a:cubicBezTo>
+                <a:close/>
+              </a:path>
+            </a:pathLst>
+          </a:custGeom>
+        </p:spPr>
+        <p:style>
+          <a:lnRef idx="2">
+            <a:schemeClr val="accent1">
+              <a:shade val="15000"/>
+            </a:schemeClr>
+          </a:lnRef>
+          <a:fillRef idx="1">
+            <a:schemeClr val="accent1"/>
+          </a:fillRef>
+          <a:effectRef idx="0">
+            <a:schemeClr val="accent1"/>
+          </a:effectRef>
+          <a:fontRef idx="minor">
+            <a:schemeClr val="lt1"/>
+          </a:fontRef>
+        </p:style>
+        <p:txBody>
+          <a:bodyPr rtlCol="0" anchor="ctr"/>
+          <a:lstStyle/>
+          <a:p>
+            <a:pPr algn="ctr"/>
+            <a:r>
+              <a:rPr lang="en-US" dirty="0"/>
+              <a:t>Base Model</a:t>
+            </a:r>
+          </a:p>
+        </p:txBody>
+      </p:sp>
+      <p:sp>
+        <p:nvSpPr>
+          <p:cNvPr id="3" name="Oval 2">
+            <a:extLst>
+              <a:ext uri="{FF2B5EF4-FFF2-40B4-BE49-F238E27FC236}">
+                <a16:creationId xmlns:a16="http://schemas.microsoft.com/office/drawing/2014/main" id="{DE22D1DF-259E-1CC8-F265-D434060099F8}"/>
+              </a:ext>
+            </a:extLst>
+          </p:cNvPr>
+          <p:cNvSpPr/>
+          <p:nvPr/>
+        </p:nvSpPr>
+        <p:spPr>
+          <a:xfrm>
+            <a:off x="4965192" y="4096512"/>
+            <a:ext cx="3749040" cy="1149516"/>
+          </a:xfrm>
+          <a:prstGeom prst="ellipse">
+            <a:avLst/>
+          </a:prstGeom>
+        </p:spPr>
+        <p:style>
+          <a:lnRef idx="2">
+            <a:schemeClr val="accent1">
+              <a:shade val="15000"/>
+            </a:schemeClr>
+          </a:lnRef>
+          <a:fillRef idx="1">
+            <a:schemeClr val="accent1"/>
+          </a:fillRef>
+          <a:effectRef idx="0">
+            <a:schemeClr val="accent1"/>
+          </a:effectRef>
+          <a:fontRef idx="minor">
+            <a:schemeClr val="lt1"/>
+          </a:fontRef>
+        </p:style>
+        <p:txBody>
+          <a:bodyPr rtlCol="0" anchor="ctr"/>
+          <a:lstStyle/>
+          <a:p>
+            <a:pPr algn="ctr"/>
+            <a:r>
+              <a:rPr lang="en-US" dirty="0"/>
+              <a:t>Fine Tuned Model</a:t>
+            </a:r>
+          </a:p>
+        </p:txBody>
+      </p:sp>
+      <p:grpSp>
+        <p:nvGrpSpPr>
+          <p:cNvPr id="8" name="Group 7">
+            <a:extLst>
+              <a:ext uri="{FF2B5EF4-FFF2-40B4-BE49-F238E27FC236}">
+                <a16:creationId xmlns:a16="http://schemas.microsoft.com/office/drawing/2014/main" id="{33A74F51-6EE3-8480-3F5C-9E35B175339E}"/>
+              </a:ext>
+            </a:extLst>
+          </p:cNvPr>
+          <p:cNvGrpSpPr/>
+          <p:nvPr/>
+        </p:nvGrpSpPr>
+        <p:grpSpPr>
+          <a:xfrm>
+            <a:off x="3675888" y="4279392"/>
+            <a:ext cx="792720" cy="266760"/>
+            <a:chOff x="2910024" y="4399416"/>
+            <a:chExt cx="792720" cy="266760"/>
+          </a:xfrm>
+        </p:grpSpPr>
+        <mc:AlternateContent xmlns:mc="http://schemas.openxmlformats.org/markup-compatibility/2006" xmlns:p14="http://schemas.microsoft.com/office/powerpoint/2010/main">
+          <mc:Choice Requires="p14">
+            <p:contentPart p14:bwMode="auto" r:id="rId2">
+              <p14:nvContentPartPr>
+                <p14:cNvPr id="10" name="Ink 9">
+                  <a:extLst>
+                    <a:ext uri="{FF2B5EF4-FFF2-40B4-BE49-F238E27FC236}">
+                      <a16:creationId xmlns:a16="http://schemas.microsoft.com/office/drawing/2014/main" id="{CCD839BD-4347-462F-AC29-084818E84A94}"/>
+                    </a:ext>
+                  </a:extLst>
+                </p14:cNvPr>
+                <p14:cNvContentPartPr/>
+                <p14:nvPr/>
+              </p14:nvContentPartPr>
+              <p14:xfrm>
+                <a:off x="2910024" y="4525776"/>
+                <a:ext cx="739440" cy="64800"/>
+              </p14:xfrm>
+            </p:contentPart>
+          </mc:Choice>
+          <mc:Fallback xmlns="">
+            <p:pic>
+              <p:nvPicPr>
+                <p:cNvPr id="10" name="Ink 9">
+                  <a:extLst>
+                    <a:ext uri="{FF2B5EF4-FFF2-40B4-BE49-F238E27FC236}">
+                      <a16:creationId xmlns:a16="http://schemas.microsoft.com/office/drawing/2014/main" id="{CCD839BD-4347-462F-AC29-084818E84A94}"/>
+                    </a:ext>
+                  </a:extLst>
+                </p:cNvPr>
+                <p:cNvPicPr/>
+                <p:nvPr/>
+              </p:nvPicPr>
+              <p:blipFill>
+                <a:blip r:embed="rId3"/>
+                <a:stretch>
+                  <a:fillRect/>
+                </a:stretch>
+              </p:blipFill>
+              <p:spPr>
+                <a:xfrm>
+                  <a:off x="2892033" y="4507776"/>
+                  <a:ext cx="775063" cy="100440"/>
+                </a:xfrm>
+                <a:prstGeom prst="rect">
+                  <a:avLst/>
+                </a:prstGeom>
+              </p:spPr>
+            </p:pic>
+          </mc:Fallback>
+        </mc:AlternateContent>
+        <mc:AlternateContent xmlns:mc="http://schemas.openxmlformats.org/markup-compatibility/2006" xmlns:p14="http://schemas.microsoft.com/office/powerpoint/2010/main">
+          <mc:Choice Requires="p14">
+            <p:contentPart p14:bwMode="auto" r:id="rId4">
+              <p14:nvContentPartPr>
+                <p14:cNvPr id="11" name="Ink 10">
+                  <a:extLst>
+                    <a:ext uri="{FF2B5EF4-FFF2-40B4-BE49-F238E27FC236}">
+                      <a16:creationId xmlns:a16="http://schemas.microsoft.com/office/drawing/2014/main" id="{EFE146C4-ADD8-516C-5ED4-9A1E3F3B836A}"/>
+                    </a:ext>
+                  </a:extLst>
+                </p14:cNvPr>
+                <p14:cNvContentPartPr/>
+                <p14:nvPr/>
+              </p14:nvContentPartPr>
+              <p14:xfrm>
+                <a:off x="3521304" y="4399416"/>
+                <a:ext cx="181440" cy="266760"/>
+              </p14:xfrm>
+            </p:contentPart>
+          </mc:Choice>
+          <mc:Fallback xmlns="">
+            <p:pic>
+              <p:nvPicPr>
+                <p:cNvPr id="11" name="Ink 10">
+                  <a:extLst>
+                    <a:ext uri="{FF2B5EF4-FFF2-40B4-BE49-F238E27FC236}">
+                      <a16:creationId xmlns:a16="http://schemas.microsoft.com/office/drawing/2014/main" id="{EFE146C4-ADD8-516C-5ED4-9A1E3F3B836A}"/>
+                    </a:ext>
+                  </a:extLst>
+                </p:cNvPr>
+                <p:cNvPicPr/>
+                <p:nvPr/>
+              </p:nvPicPr>
+              <p:blipFill>
+                <a:blip r:embed="rId5"/>
+                <a:stretch>
+                  <a:fillRect/>
+                </a:stretch>
+              </p:blipFill>
+              <p:spPr>
+                <a:xfrm>
+                  <a:off x="3503304" y="4381392"/>
+                  <a:ext cx="217080" cy="302448"/>
+                </a:xfrm>
+                <a:prstGeom prst="rect">
+                  <a:avLst/>
+                </a:prstGeom>
+              </p:spPr>
+            </p:pic>
+          </mc:Fallback>
+        </mc:AlternateContent>
+      </p:grpSp>
+    </p:spTree>
+    <p:extLst>
+      <p:ext uri="{BB962C8B-B14F-4D97-AF65-F5344CB8AC3E}">
+        <p14:creationId xmlns:p14="http://schemas.microsoft.com/office/powerpoint/2010/main" val="1902430033"/>
+      </p:ext>
+    </p:extLst>
+  </p:cSld>
+  <p:clrMapOvr>
+    <a:masterClrMapping/>
+  </p:clrMapOvr>
+</p:sld>
+</file>
+
+<file path=ppt/slides/slide11.xml><?xml version="1.0" encoding="utf-8"?>
 <p:sld xmlns:a="http://schemas.openxmlformats.org/drawingml/2006/main" xmlns:r="http://schemas.openxmlformats.org/officeDocument/2006/relationships" xmlns:p="http://schemas.openxmlformats.org/presentationml/2006/main">
   <p:cSld>
     <p:spTree>
@@ -8845,7 +9639,7 @@
 </p:sld>
 </file>
 
-<file path=ppt/slides/slide11.xml><?xml version="1.0" encoding="utf-8"?>
+<file path=ppt/slides/slide12.xml><?xml version="1.0" encoding="utf-8"?>
 <p:sld xmlns:a="http://schemas.openxmlformats.org/drawingml/2006/main" xmlns:r="http://schemas.openxmlformats.org/officeDocument/2006/relationships" xmlns:p="http://schemas.openxmlformats.org/presentationml/2006/main">
   <p:cSld>
     <p:spTree>
@@ -9064,7 +9858,7 @@
 </p:sld>
 </file>
 
-<file path=ppt/slides/slide12.xml><?xml version="1.0" encoding="utf-8"?>
+<file path=ppt/slides/slide13.xml><?xml version="1.0" encoding="utf-8"?>
 <p:sld xmlns:a="http://schemas.openxmlformats.org/drawingml/2006/main" xmlns:r="http://schemas.openxmlformats.org/officeDocument/2006/relationships" xmlns:p="http://schemas.openxmlformats.org/presentationml/2006/main">
   <p:cSld>
     <p:spTree>
@@ -11586,7 +12380,7 @@
 </p:sld>
 </file>
 
-<file path=ppt/slides/slide13.xml><?xml version="1.0" encoding="utf-8"?>
+<file path=ppt/slides/slide14.xml><?xml version="1.0" encoding="utf-8"?>
 <p:sld xmlns:a="http://schemas.openxmlformats.org/drawingml/2006/main" xmlns:r="http://schemas.openxmlformats.org/officeDocument/2006/relationships" xmlns:p="http://schemas.openxmlformats.org/presentationml/2006/main">
   <p:cSld>
     <p:spTree>
@@ -12553,7 +13347,7 @@
 </p:sld>
 </file>
 
-<file path=ppt/slides/slide14.xml><?xml version="1.0" encoding="utf-8"?>
+<file path=ppt/slides/slide15.xml><?xml version="1.0" encoding="utf-8"?>
 <p:sld xmlns:a="http://schemas.openxmlformats.org/drawingml/2006/main" xmlns:r="http://schemas.openxmlformats.org/officeDocument/2006/relationships" xmlns:p="http://schemas.openxmlformats.org/presentationml/2006/main">
   <p:cSld>
     <p:spTree>
@@ -13456,7 +14250,7 @@
 </p:sld>
 </file>
 
-<file path=ppt/slides/slide15.xml><?xml version="1.0" encoding="utf-8"?>
+<file path=ppt/slides/slide16.xml><?xml version="1.0" encoding="utf-8"?>
 <p:sld xmlns:a="http://schemas.openxmlformats.org/drawingml/2006/main" xmlns:r="http://schemas.openxmlformats.org/officeDocument/2006/relationships" xmlns:p="http://schemas.openxmlformats.org/presentationml/2006/main">
   <p:cSld>
     <p:spTree>
@@ -14265,7 +15059,7 @@
 </p:sld>
 </file>
 
-<file path=ppt/slides/slide16.xml><?xml version="1.0" encoding="utf-8"?>
+<file path=ppt/slides/slide17.xml><?xml version="1.0" encoding="utf-8"?>
 <p:sld xmlns:a="http://schemas.openxmlformats.org/drawingml/2006/main" xmlns:r="http://schemas.openxmlformats.org/officeDocument/2006/relationships" xmlns:p="http://schemas.openxmlformats.org/presentationml/2006/main">
   <p:cSld>
     <p:spTree>
@@ -14288,168 +15082,6 @@
           <a:chExt cx="0" cy="0"/>
         </a:xfrm>
       </p:grpSpPr>
-      <p:sp>
-        <p:nvSpPr>
-          <p:cNvPr id="2" name="Title 1">
-            <a:extLst>
-              <a:ext uri="{FF2B5EF4-FFF2-40B4-BE49-F238E27FC236}">
-                <a16:creationId xmlns:a16="http://schemas.microsoft.com/office/drawing/2014/main" id="{795E1B75-886E-0812-B2FD-DD250C225521}"/>
-              </a:ext>
-            </a:extLst>
-          </p:cNvPr>
-          <p:cNvSpPr>
-            <a:spLocks noGrp="1"/>
-          </p:cNvSpPr>
-          <p:nvPr>
-            <p:ph type="title"/>
-          </p:nvPr>
-        </p:nvSpPr>
-        <p:spPr>
-          <a:xfrm>
-            <a:off x="274320" y="136525"/>
-            <a:ext cx="11466576" cy="832739"/>
-          </a:xfrm>
-        </p:spPr>
-        <p:txBody>
-          <a:bodyPr>
-            <a:normAutofit/>
-          </a:bodyPr>
-          <a:lstStyle/>
-          <a:p>
-            <a:r>
-              <a:rPr lang="en-US" sz="3600" dirty="0"/>
-              <a:t>EXTRA</a:t>
-            </a:r>
-          </a:p>
-        </p:txBody>
-      </p:sp>
-      <p:sp>
-        <p:nvSpPr>
-          <p:cNvPr id="4" name="TextBox 3">
-            <a:extLst>
-              <a:ext uri="{FF2B5EF4-FFF2-40B4-BE49-F238E27FC236}">
-                <a16:creationId xmlns:a16="http://schemas.microsoft.com/office/drawing/2014/main" id="{902F8BE4-9CEA-0DAD-0357-E0A8215F169D}"/>
-              </a:ext>
-            </a:extLst>
-          </p:cNvPr>
-          <p:cNvSpPr txBox="1"/>
-          <p:nvPr/>
-        </p:nvSpPr>
-        <p:spPr>
-          <a:xfrm>
-            <a:off x="274320" y="933117"/>
-            <a:ext cx="11658600" cy="1477328"/>
-          </a:xfrm>
-          <a:prstGeom prst="rect">
-            <a:avLst/>
-          </a:prstGeom>
-          <a:noFill/>
-        </p:spPr>
-        <p:txBody>
-          <a:bodyPr wrap="square">
-            <a:spAutoFit/>
-          </a:bodyPr>
-          <a:lstStyle/>
-          <a:p>
-            <a:pPr marL="0" indent="0">
-              <a:buNone/>
-            </a:pPr>
-            <a:r>
-              <a:rPr lang="en-US" dirty="0" err="1">
-                <a:solidFill>
-                  <a:schemeClr val="accent6">
-                    <a:lumMod val="60000"/>
-                    <a:lumOff val="40000"/>
-                  </a:schemeClr>
-                </a:solidFill>
-              </a:rPr>
-              <a:t>Ffnbksdfd</a:t>
-            </a:r>
-            <a:endParaRPr lang="en-US" dirty="0">
-              <a:solidFill>
-                <a:schemeClr val="accent6">
-                  <a:lumMod val="60000"/>
-                  <a:lumOff val="40000"/>
-                </a:schemeClr>
-              </a:solidFill>
-            </a:endParaRPr>
-          </a:p>
-          <a:p>
-            <a:pPr marL="0" indent="0">
-              <a:buNone/>
-            </a:pPr>
-            <a:r>
-              <a:rPr lang="en-US" dirty="0" err="1">
-                <a:solidFill>
-                  <a:schemeClr val="accent6">
-                    <a:lumMod val="60000"/>
-                    <a:lumOff val="40000"/>
-                  </a:schemeClr>
-                </a:solidFill>
-              </a:rPr>
-              <a:t>Fdslj;f</a:t>
-            </a:r>
-            <a:endParaRPr lang="en-US" dirty="0">
-              <a:solidFill>
-                <a:schemeClr val="accent6">
-                  <a:lumMod val="60000"/>
-                  <a:lumOff val="40000"/>
-                </a:schemeClr>
-              </a:solidFill>
-            </a:endParaRPr>
-          </a:p>
-          <a:p>
-            <a:pPr marL="0" indent="0">
-              <a:buNone/>
-            </a:pPr>
-            <a:endParaRPr lang="en-US" dirty="0">
-              <a:solidFill>
-                <a:schemeClr val="accent6">
-                  <a:lumMod val="60000"/>
-                  <a:lumOff val="40000"/>
-                </a:schemeClr>
-              </a:solidFill>
-            </a:endParaRPr>
-          </a:p>
-          <a:p>
-            <a:pPr marL="0" indent="0">
-              <a:buNone/>
-            </a:pPr>
-            <a:r>
-              <a:rPr lang="en-US" dirty="0" err="1">
-                <a:solidFill>
-                  <a:schemeClr val="accent6">
-                    <a:lumMod val="60000"/>
-                    <a:lumOff val="40000"/>
-                  </a:schemeClr>
-                </a:solidFill>
-              </a:rPr>
-              <a:t>Fl;ds</a:t>
-            </a:r>
-            <a:endParaRPr lang="en-US" dirty="0">
-              <a:solidFill>
-                <a:schemeClr val="accent6">
-                  <a:lumMod val="60000"/>
-                  <a:lumOff val="40000"/>
-                </a:schemeClr>
-              </a:solidFill>
-            </a:endParaRPr>
-          </a:p>
-          <a:p>
-            <a:pPr marL="0" indent="0">
-              <a:buNone/>
-            </a:pPr>
-            <a:endParaRPr lang="en-US" dirty="0">
-              <a:solidFill>
-                <a:schemeClr val="accent6">
-                  <a:lumMod val="60000"/>
-                  <a:lumOff val="40000"/>
-                </a:schemeClr>
-              </a:solidFill>
-            </a:endParaRPr>
-          </a:p>
-        </p:txBody>
-      </p:sp>
     </p:spTree>
     <p:extLst>
       <p:ext uri="{BB962C8B-B14F-4D97-AF65-F5344CB8AC3E}">
@@ -15381,6 +16013,540 @@
 </file>
 
 <file path=ppt/slides/slide3.xml><?xml version="1.0" encoding="utf-8"?>
+<p:sld xmlns:a="http://schemas.openxmlformats.org/drawingml/2006/main" xmlns:r="http://schemas.openxmlformats.org/officeDocument/2006/relationships" xmlns:p="http://schemas.openxmlformats.org/presentationml/2006/main">
+  <p:cSld>
+    <p:spTree>
+      <p:nvGrpSpPr>
+        <p:cNvPr id="1" name="">
+          <a:extLst>
+            <a:ext uri="{FF2B5EF4-FFF2-40B4-BE49-F238E27FC236}">
+              <a16:creationId xmlns:a16="http://schemas.microsoft.com/office/drawing/2014/main" id="{6BDE5F1B-AB4C-7878-F267-EC5B284AF283}"/>
+            </a:ext>
+          </a:extLst>
+        </p:cNvPr>
+        <p:cNvGrpSpPr/>
+        <p:nvPr/>
+      </p:nvGrpSpPr>
+      <p:grpSpPr>
+        <a:xfrm>
+          <a:off x="0" y="0"/>
+          <a:ext cx="0" cy="0"/>
+          <a:chOff x="0" y="0"/>
+          <a:chExt cx="0" cy="0"/>
+        </a:xfrm>
+      </p:grpSpPr>
+      <p:sp>
+        <p:nvSpPr>
+          <p:cNvPr id="9" name="TextBox 8">
+            <a:extLst>
+              <a:ext uri="{FF2B5EF4-FFF2-40B4-BE49-F238E27FC236}">
+                <a16:creationId xmlns:a16="http://schemas.microsoft.com/office/drawing/2014/main" id="{2B086805-28FD-4144-5054-74C862062E46}"/>
+              </a:ext>
+            </a:extLst>
+          </p:cNvPr>
+          <p:cNvSpPr txBox="1"/>
+          <p:nvPr/>
+        </p:nvSpPr>
+        <p:spPr>
+          <a:xfrm>
+            <a:off x="111760" y="1423541"/>
+            <a:ext cx="4350512" cy="5016758"/>
+          </a:xfrm>
+          <a:prstGeom prst="rect">
+            <a:avLst/>
+          </a:prstGeom>
+          <a:noFill/>
+        </p:spPr>
+        <p:txBody>
+          <a:bodyPr wrap="square">
+            <a:spAutoFit/>
+          </a:bodyPr>
+          <a:lstStyle/>
+          <a:p>
+            <a:r>
+              <a:rPr lang="en-IN" sz="2000" i="1" dirty="0">
+                <a:solidFill>
+                  <a:schemeClr val="accent6">
+                    <a:lumMod val="60000"/>
+                    <a:lumOff val="40000"/>
+                  </a:schemeClr>
+                </a:solidFill>
+              </a:rPr>
+              <a:t>The lungs are hyperexpanded. There is patchy, ill-defined airspace opacity noted in the right lower lung zone. No focal consolidation is identified in the left lung. </a:t>
+            </a:r>
+          </a:p>
+          <a:p>
+            <a:endParaRPr lang="en-IN" sz="2000" i="1" dirty="0">
+              <a:solidFill>
+                <a:schemeClr val="accent6">
+                  <a:lumMod val="60000"/>
+                  <a:lumOff val="40000"/>
+                </a:schemeClr>
+              </a:solidFill>
+            </a:endParaRPr>
+          </a:p>
+          <a:p>
+            <a:r>
+              <a:rPr lang="en-IN" sz="2000" i="1" dirty="0">
+                <a:solidFill>
+                  <a:schemeClr val="accent6">
+                    <a:lumMod val="60000"/>
+                    <a:lumOff val="40000"/>
+                  </a:schemeClr>
+                </a:solidFill>
+              </a:rPr>
+              <a:t>The </a:t>
+            </a:r>
+            <a:r>
+              <a:rPr lang="en-IN" sz="2000" i="1" dirty="0" err="1">
+                <a:solidFill>
+                  <a:schemeClr val="accent6">
+                    <a:lumMod val="60000"/>
+                    <a:lumOff val="40000"/>
+                  </a:schemeClr>
+                </a:solidFill>
+              </a:rPr>
+              <a:t>cardiomediastinal</a:t>
+            </a:r>
+            <a:r>
+              <a:rPr lang="en-IN" sz="2000" i="1" dirty="0">
+                <a:solidFill>
+                  <a:schemeClr val="accent6">
+                    <a:lumMod val="60000"/>
+                    <a:lumOff val="40000"/>
+                  </a:schemeClr>
+                </a:solidFill>
+              </a:rPr>
+              <a:t> silhouette is stable and within normal limits of size. </a:t>
+            </a:r>
+          </a:p>
+          <a:p>
+            <a:r>
+              <a:rPr lang="en-IN" sz="2000" i="1" dirty="0">
+                <a:solidFill>
+                  <a:schemeClr val="accent6">
+                    <a:lumMod val="60000"/>
+                    <a:lumOff val="40000"/>
+                  </a:schemeClr>
+                </a:solidFill>
+              </a:rPr>
+              <a:t>There is a small blunting of the right costophrenic angle. The left costophrenic angle is sharp. No pneumothorax is seen. </a:t>
+            </a:r>
+          </a:p>
+          <a:p>
+            <a:endParaRPr lang="en-IN" sz="2000" i="1" dirty="0">
+              <a:solidFill>
+                <a:schemeClr val="accent6">
+                  <a:lumMod val="60000"/>
+                  <a:lumOff val="40000"/>
+                </a:schemeClr>
+              </a:solidFill>
+            </a:endParaRPr>
+          </a:p>
+          <a:p>
+            <a:r>
+              <a:rPr lang="en-IN" sz="2000" i="1" dirty="0">
+                <a:solidFill>
+                  <a:schemeClr val="accent6">
+                    <a:lumMod val="60000"/>
+                    <a:lumOff val="40000"/>
+                  </a:schemeClr>
+                </a:solidFill>
+              </a:rPr>
+              <a:t>Visualized osseous structures are intact.</a:t>
+            </a:r>
+          </a:p>
+          <a:p>
+            <a:endParaRPr lang="en-IN" sz="2000" i="1" dirty="0">
+              <a:solidFill>
+                <a:schemeClr val="accent6">
+                  <a:lumMod val="60000"/>
+                  <a:lumOff val="40000"/>
+                </a:schemeClr>
+              </a:solidFill>
+            </a:endParaRPr>
+          </a:p>
+          <a:p>
+            <a:r>
+              <a:rPr lang="en-IN" sz="2000" i="1" dirty="0">
+                <a:solidFill>
+                  <a:schemeClr val="accent6">
+                    <a:lumMod val="60000"/>
+                    <a:lumOff val="40000"/>
+                  </a:schemeClr>
+                </a:solidFill>
+              </a:rPr>
+              <a:t>Date: 9/4/2002</a:t>
+            </a:r>
+          </a:p>
+        </p:txBody>
+      </p:sp>
+      <p:sp>
+        <p:nvSpPr>
+          <p:cNvPr id="3" name="Oval 2">
+            <a:extLst>
+              <a:ext uri="{FF2B5EF4-FFF2-40B4-BE49-F238E27FC236}">
+                <a16:creationId xmlns:a16="http://schemas.microsoft.com/office/drawing/2014/main" id="{E6E4A9C5-AAFD-1E10-DE49-611D4C185A26}"/>
+              </a:ext>
+            </a:extLst>
+          </p:cNvPr>
+          <p:cNvSpPr/>
+          <p:nvPr/>
+        </p:nvSpPr>
+        <p:spPr>
+          <a:xfrm>
+            <a:off x="4783329" y="2621070"/>
+            <a:ext cx="2267712" cy="1137114"/>
+          </a:xfrm>
+          <a:prstGeom prst="ellipse">
+            <a:avLst/>
+          </a:prstGeom>
+        </p:spPr>
+        <p:style>
+          <a:lnRef idx="2">
+            <a:schemeClr val="accent1">
+              <a:shade val="15000"/>
+            </a:schemeClr>
+          </a:lnRef>
+          <a:fillRef idx="1">
+            <a:schemeClr val="accent1"/>
+          </a:fillRef>
+          <a:effectRef idx="0">
+            <a:schemeClr val="accent1"/>
+          </a:effectRef>
+          <a:fontRef idx="minor">
+            <a:schemeClr val="lt1"/>
+          </a:fontRef>
+        </p:style>
+        <p:txBody>
+          <a:bodyPr rtlCol="0" anchor="ctr"/>
+          <a:lstStyle/>
+          <a:p>
+            <a:pPr algn="ctr"/>
+            <a:r>
+              <a:rPr lang="en-US" dirty="0"/>
+              <a:t>Fine Tuned Model</a:t>
+            </a:r>
+          </a:p>
+        </p:txBody>
+      </p:sp>
+      <p:sp>
+        <p:nvSpPr>
+          <p:cNvPr id="4" name="TextBox 3">
+            <a:extLst>
+              <a:ext uri="{FF2B5EF4-FFF2-40B4-BE49-F238E27FC236}">
+                <a16:creationId xmlns:a16="http://schemas.microsoft.com/office/drawing/2014/main" id="{20C6AFF7-6CA8-40B9-3D65-ED02D5F0D966}"/>
+              </a:ext>
+            </a:extLst>
+          </p:cNvPr>
+          <p:cNvSpPr txBox="1"/>
+          <p:nvPr/>
+        </p:nvSpPr>
+        <p:spPr>
+          <a:xfrm>
+            <a:off x="7695184" y="2135492"/>
+            <a:ext cx="4496816" cy="2108269"/>
+          </a:xfrm>
+          <a:prstGeom prst="rect">
+            <a:avLst/>
+          </a:prstGeom>
+          <a:noFill/>
+        </p:spPr>
+        <p:txBody>
+          <a:bodyPr wrap="square">
+            <a:spAutoFit/>
+          </a:bodyPr>
+          <a:lstStyle/>
+          <a:p>
+            <a:pPr marL="342900" marR="0" indent="-342900">
+              <a:spcBef>
+                <a:spcPts val="300"/>
+              </a:spcBef>
+              <a:buAutoNum type="arabicPeriod"/>
+            </a:pPr>
+            <a:r>
+              <a:rPr lang="en-IN" sz="1800" b="0" i="1" u="none" strike="noStrike" dirty="0">
+                <a:solidFill>
+                  <a:schemeClr val="accent6">
+                    <a:lumMod val="60000"/>
+                    <a:lumOff val="40000"/>
+                  </a:schemeClr>
+                </a:solidFill>
+                <a:effectLst/>
+                <a:latin typeface="+mn-lt"/>
+              </a:rPr>
+              <a:t>Patchy right lower lung airspace opacity and a small right pleural effusion. Findings are highly suspicious for right lower lobe pneumonia.</a:t>
+            </a:r>
+          </a:p>
+          <a:p>
+            <a:pPr marL="342900" marR="0" indent="-342900">
+              <a:spcBef>
+                <a:spcPts val="300"/>
+              </a:spcBef>
+              <a:buAutoNum type="arabicPeriod"/>
+            </a:pPr>
+            <a:endParaRPr lang="en-IN" sz="1800" b="0" i="1" u="none" strike="noStrike" dirty="0">
+              <a:solidFill>
+                <a:schemeClr val="accent6">
+                  <a:lumMod val="60000"/>
+                  <a:lumOff val="40000"/>
+                </a:schemeClr>
+              </a:solidFill>
+              <a:effectLst/>
+              <a:latin typeface="+mn-lt"/>
+            </a:endParaRPr>
+          </a:p>
+          <a:p>
+            <a:pPr marL="342900" marR="0" indent="-342900">
+              <a:spcBef>
+                <a:spcPts val="300"/>
+              </a:spcBef>
+              <a:buAutoNum type="arabicPeriod"/>
+            </a:pPr>
+            <a:r>
+              <a:rPr lang="en-IN" sz="1800" b="0" i="1" u="none" strike="noStrike" dirty="0">
+                <a:solidFill>
+                  <a:schemeClr val="accent6">
+                    <a:lumMod val="60000"/>
+                    <a:lumOff val="40000"/>
+                  </a:schemeClr>
+                </a:solidFill>
+                <a:effectLst/>
+                <a:latin typeface="+mn-lt"/>
+              </a:rPr>
+              <a:t>Emphysematous changes (lung </a:t>
+            </a:r>
+            <a:r>
+              <a:rPr lang="en-IN" sz="1800" b="0" i="1" u="none" strike="noStrike" dirty="0" err="1">
+                <a:solidFill>
+                  <a:schemeClr val="accent6">
+                    <a:lumMod val="60000"/>
+                    <a:lumOff val="40000"/>
+                  </a:schemeClr>
+                </a:solidFill>
+                <a:effectLst/>
+                <a:latin typeface="+mn-lt"/>
+              </a:rPr>
+              <a:t>hyperexpansion</a:t>
+            </a:r>
+            <a:r>
+              <a:rPr lang="en-IN" sz="1800" b="0" i="1" u="none" strike="noStrike" dirty="0">
+                <a:solidFill>
+                  <a:schemeClr val="accent6">
+                    <a:lumMod val="60000"/>
+                    <a:lumOff val="40000"/>
+                  </a:schemeClr>
+                </a:solidFill>
+                <a:effectLst/>
+                <a:latin typeface="+mn-lt"/>
+              </a:rPr>
+              <a:t>).</a:t>
+            </a:r>
+            <a:endParaRPr lang="en-IN" sz="1200" b="0" u="none" strike="noStrike" dirty="0">
+              <a:solidFill>
+                <a:schemeClr val="accent6">
+                  <a:lumMod val="60000"/>
+                  <a:lumOff val="40000"/>
+                </a:schemeClr>
+              </a:solidFill>
+              <a:effectLst/>
+              <a:latin typeface="Google Sans"/>
+            </a:endParaRPr>
+          </a:p>
+        </p:txBody>
+      </p:sp>
+      <p:sp>
+        <p:nvSpPr>
+          <p:cNvPr id="6" name="TextBox 5">
+            <a:extLst>
+              <a:ext uri="{FF2B5EF4-FFF2-40B4-BE49-F238E27FC236}">
+                <a16:creationId xmlns:a16="http://schemas.microsoft.com/office/drawing/2014/main" id="{64E187E8-3694-CAFE-BD90-78A239924E57}"/>
+              </a:ext>
+            </a:extLst>
+          </p:cNvPr>
+          <p:cNvSpPr txBox="1"/>
+          <p:nvPr/>
+        </p:nvSpPr>
+        <p:spPr>
+          <a:xfrm>
+            <a:off x="2061972" y="172230"/>
+            <a:ext cx="8316468" cy="707886"/>
+          </a:xfrm>
+          <a:prstGeom prst="rect">
+            <a:avLst/>
+          </a:prstGeom>
+          <a:noFill/>
+        </p:spPr>
+        <p:txBody>
+          <a:bodyPr wrap="square">
+            <a:spAutoFit/>
+          </a:bodyPr>
+          <a:lstStyle/>
+          <a:p>
+            <a:r>
+              <a:rPr lang="en-US" sz="2000" dirty="0">
+                <a:solidFill>
+                  <a:schemeClr val="accent6">
+                    <a:lumMod val="60000"/>
+                    <a:lumOff val="40000"/>
+                  </a:schemeClr>
+                </a:solidFill>
+              </a:rPr>
+              <a:t>Example:  Fine tuned a model that takes input a </a:t>
+            </a:r>
+            <a:r>
+              <a:rPr lang="en-US" sz="2000" b="1" i="1" dirty="0">
+                <a:solidFill>
+                  <a:schemeClr val="accent6">
+                    <a:lumMod val="60000"/>
+                    <a:lumOff val="40000"/>
+                  </a:schemeClr>
+                </a:solidFill>
+              </a:rPr>
+              <a:t>detailed</a:t>
+            </a:r>
+            <a:r>
+              <a:rPr lang="en-US" sz="2000" dirty="0">
+                <a:solidFill>
+                  <a:schemeClr val="accent6">
+                    <a:lumMod val="60000"/>
+                    <a:lumOff val="40000"/>
+                  </a:schemeClr>
+                </a:solidFill>
+              </a:rPr>
+              <a:t> radiologist notes and outputs </a:t>
+            </a:r>
+            <a:r>
+              <a:rPr lang="en-US" sz="2000" b="1" i="1" dirty="0">
+                <a:solidFill>
+                  <a:schemeClr val="accent6">
+                    <a:lumMod val="60000"/>
+                    <a:lumOff val="40000"/>
+                  </a:schemeClr>
+                </a:solidFill>
+              </a:rPr>
+              <a:t>concise + structured text </a:t>
+            </a:r>
+            <a:r>
+              <a:rPr lang="en-US" sz="2000" dirty="0">
+                <a:solidFill>
+                  <a:schemeClr val="accent6">
+                    <a:lumMod val="60000"/>
+                    <a:lumOff val="40000"/>
+                  </a:schemeClr>
+                </a:solidFill>
+              </a:rPr>
+              <a:t>containing only necessary information</a:t>
+            </a:r>
+          </a:p>
+        </p:txBody>
+      </p:sp>
+      <p:sp>
+        <p:nvSpPr>
+          <p:cNvPr id="12" name="Arrow: Right 11">
+            <a:extLst>
+              <a:ext uri="{FF2B5EF4-FFF2-40B4-BE49-F238E27FC236}">
+                <a16:creationId xmlns:a16="http://schemas.microsoft.com/office/drawing/2014/main" id="{9BF78EA4-F9AA-322E-9F66-0A2762C5123B}"/>
+              </a:ext>
+            </a:extLst>
+          </p:cNvPr>
+          <p:cNvSpPr/>
+          <p:nvPr/>
+        </p:nvSpPr>
+        <p:spPr>
+          <a:xfrm>
+            <a:off x="4270248" y="2926080"/>
+            <a:ext cx="438912" cy="502920"/>
+          </a:xfrm>
+          <a:prstGeom prst="rightArrow">
+            <a:avLst/>
+          </a:prstGeom>
+        </p:spPr>
+        <p:style>
+          <a:lnRef idx="2">
+            <a:schemeClr val="accent1">
+              <a:shade val="15000"/>
+            </a:schemeClr>
+          </a:lnRef>
+          <a:fillRef idx="1">
+            <a:schemeClr val="accent1"/>
+          </a:fillRef>
+          <a:effectRef idx="0">
+            <a:schemeClr val="accent1"/>
+          </a:effectRef>
+          <a:fontRef idx="minor">
+            <a:schemeClr val="lt1"/>
+          </a:fontRef>
+        </p:style>
+        <p:txBody>
+          <a:bodyPr rtlCol="0" anchor="ctr"/>
+          <a:lstStyle/>
+          <a:p>
+            <a:pPr algn="ctr"/>
+            <a:endParaRPr lang="en-IN"/>
+          </a:p>
+        </p:txBody>
+      </p:sp>
+      <p:sp>
+        <p:nvSpPr>
+          <p:cNvPr id="14" name="Arrow: Right 13">
+            <a:extLst>
+              <a:ext uri="{FF2B5EF4-FFF2-40B4-BE49-F238E27FC236}">
+                <a16:creationId xmlns:a16="http://schemas.microsoft.com/office/drawing/2014/main" id="{E6D4D06F-D80E-5940-CED3-14173970E115}"/>
+              </a:ext>
+            </a:extLst>
+          </p:cNvPr>
+          <p:cNvSpPr/>
+          <p:nvPr/>
+        </p:nvSpPr>
+        <p:spPr>
+          <a:xfrm>
+            <a:off x="7125210" y="2926080"/>
+            <a:ext cx="438912" cy="502920"/>
+          </a:xfrm>
+          <a:prstGeom prst="rightArrow">
+            <a:avLst/>
+          </a:prstGeom>
+        </p:spPr>
+        <p:style>
+          <a:lnRef idx="2">
+            <a:schemeClr val="accent1">
+              <a:shade val="15000"/>
+            </a:schemeClr>
+          </a:lnRef>
+          <a:fillRef idx="1">
+            <a:schemeClr val="accent1"/>
+          </a:fillRef>
+          <a:effectRef idx="0">
+            <a:schemeClr val="accent1"/>
+          </a:effectRef>
+          <a:fontRef idx="minor">
+            <a:schemeClr val="lt1"/>
+          </a:fontRef>
+        </p:style>
+        <p:txBody>
+          <a:bodyPr rtlCol="0" anchor="ctr"/>
+          <a:lstStyle/>
+          <a:p>
+            <a:pPr algn="ctr"/>
+            <a:endParaRPr lang="en-IN"/>
+          </a:p>
+        </p:txBody>
+      </p:sp>
+    </p:spTree>
+    <p:extLst>
+      <p:ext uri="{BB962C8B-B14F-4D97-AF65-F5344CB8AC3E}">
+        <p14:creationId xmlns:p14="http://schemas.microsoft.com/office/powerpoint/2010/main" val="3146277104"/>
+      </p:ext>
+    </p:extLst>
+  </p:cSld>
+  <p:clrMapOvr>
+    <a:masterClrMapping/>
+  </p:clrMapOvr>
+</p:sld>
+</file>
+
+<file path=ppt/slides/slide4.xml><?xml version="1.0" encoding="utf-8"?>
 <p:sld xmlns:a="http://schemas.openxmlformats.org/drawingml/2006/main" xmlns:r="http://schemas.openxmlformats.org/officeDocument/2006/relationships" xmlns:p="http://schemas.openxmlformats.org/presentationml/2006/main">
   <p:cSld>
     <p:spTree>
@@ -16565,7 +17731,7 @@
 </p:sld>
 </file>
 
-<file path=ppt/slides/slide4.xml><?xml version="1.0" encoding="utf-8"?>
+<file path=ppt/slides/slide5.xml><?xml version="1.0" encoding="utf-8"?>
 <p:sld xmlns:a="http://schemas.openxmlformats.org/drawingml/2006/main" xmlns:r="http://schemas.openxmlformats.org/officeDocument/2006/relationships" xmlns:p="http://schemas.openxmlformats.org/presentationml/2006/main">
   <p:cSld>
     <p:spTree>
@@ -17248,7 +18414,7 @@
 </p:sld>
 </file>
 
-<file path=ppt/slides/slide5.xml><?xml version="1.0" encoding="utf-8"?>
+<file path=ppt/slides/slide6.xml><?xml version="1.0" encoding="utf-8"?>
 <p:sld xmlns:a="http://schemas.openxmlformats.org/drawingml/2006/main" xmlns:r="http://schemas.openxmlformats.org/officeDocument/2006/relationships" xmlns:p="http://schemas.openxmlformats.org/presentationml/2006/main">
   <p:cSld>
     <p:spTree>
@@ -17831,7 +18997,7 @@
 </p:sld>
 </file>
 
-<file path=ppt/slides/slide6.xml><?xml version="1.0" encoding="utf-8"?>
+<file path=ppt/slides/slide7.xml><?xml version="1.0" encoding="utf-8"?>
 <p:sld xmlns:a="http://schemas.openxmlformats.org/drawingml/2006/main" xmlns:r="http://schemas.openxmlformats.org/officeDocument/2006/relationships" xmlns:p="http://schemas.openxmlformats.org/presentationml/2006/main">
   <p:cSld>
     <p:spTree>
@@ -18934,7 +20100,7 @@
 </p:sld>
 </file>
 
-<file path=ppt/slides/slide7.xml><?xml version="1.0" encoding="utf-8"?>
+<file path=ppt/slides/slide8.xml><?xml version="1.0" encoding="utf-8"?>
 <p:sld xmlns:a="http://schemas.openxmlformats.org/drawingml/2006/main" xmlns:r="http://schemas.openxmlformats.org/officeDocument/2006/relationships" xmlns:p="http://schemas.openxmlformats.org/presentationml/2006/main">
   <p:cSld>
     <p:spTree>
@@ -19966,7 +21132,7 @@
 </p:sld>
 </file>
 
-<file path=ppt/slides/slide8.xml><?xml version="1.0" encoding="utf-8"?>
+<file path=ppt/slides/slide9.xml><?xml version="1.0" encoding="utf-8"?>
 <p:sld xmlns:a="http://schemas.openxmlformats.org/drawingml/2006/main" xmlns:r="http://schemas.openxmlformats.org/officeDocument/2006/relationships" xmlns:p="http://schemas.openxmlformats.org/presentationml/2006/main">
   <p:cSld>
     <p:spTree>
@@ -20821,799 +21987,6 @@
     <p:extLst>
       <p:ext uri="{BB962C8B-B14F-4D97-AF65-F5344CB8AC3E}">
         <p14:creationId xmlns:p14="http://schemas.microsoft.com/office/powerpoint/2010/main" val="745250442"/>
-      </p:ext>
-    </p:extLst>
-  </p:cSld>
-  <p:clrMapOvr>
-    <a:masterClrMapping/>
-  </p:clrMapOvr>
-</p:sld>
-</file>
-
-<file path=ppt/slides/slide9.xml><?xml version="1.0" encoding="utf-8"?>
-<p:sld xmlns:a="http://schemas.openxmlformats.org/drawingml/2006/main" xmlns:r="http://schemas.openxmlformats.org/officeDocument/2006/relationships" xmlns:p="http://schemas.openxmlformats.org/presentationml/2006/main">
-  <p:cSld>
-    <p:spTree>
-      <p:nvGrpSpPr>
-        <p:cNvPr id="1" name="">
-          <a:extLst>
-            <a:ext uri="{FF2B5EF4-FFF2-40B4-BE49-F238E27FC236}">
-              <a16:creationId xmlns:a16="http://schemas.microsoft.com/office/drawing/2014/main" id="{D9F28F00-DEAD-79BD-8CA3-0A7C12A5A801}"/>
-            </a:ext>
-          </a:extLst>
-        </p:cNvPr>
-        <p:cNvGrpSpPr/>
-        <p:nvPr/>
-      </p:nvGrpSpPr>
-      <p:grpSpPr>
-        <a:xfrm>
-          <a:off x="0" y="0"/>
-          <a:ext cx="0" cy="0"/>
-          <a:chOff x="0" y="0"/>
-          <a:chExt cx="0" cy="0"/>
-        </a:xfrm>
-      </p:grpSpPr>
-      <p:sp>
-        <p:nvSpPr>
-          <p:cNvPr id="9" name="TextBox 8">
-            <a:extLst>
-              <a:ext uri="{FF2B5EF4-FFF2-40B4-BE49-F238E27FC236}">
-                <a16:creationId xmlns:a16="http://schemas.microsoft.com/office/drawing/2014/main" id="{A8C3F698-F21B-1D92-2FAA-F6B2AC2CD1A4}"/>
-              </a:ext>
-            </a:extLst>
-          </p:cNvPr>
-          <p:cNvSpPr txBox="1"/>
-          <p:nvPr/>
-        </p:nvSpPr>
-        <p:spPr>
-          <a:xfrm>
-            <a:off x="148336" y="199104"/>
-            <a:ext cx="10292080" cy="830997"/>
-          </a:xfrm>
-          <a:prstGeom prst="rect">
-            <a:avLst/>
-          </a:prstGeom>
-          <a:noFill/>
-        </p:spPr>
-        <p:txBody>
-          <a:bodyPr wrap="square">
-            <a:spAutoFit/>
-          </a:bodyPr>
-          <a:lstStyle/>
-          <a:p>
-            <a:r>
-              <a:rPr lang="en-US" sz="2400" dirty="0">
-                <a:solidFill>
-                  <a:schemeClr val="accent6">
-                    <a:lumMod val="60000"/>
-                    <a:lumOff val="40000"/>
-                  </a:schemeClr>
-                </a:solidFill>
-              </a:rPr>
-              <a:t>NOTE: </a:t>
-            </a:r>
-          </a:p>
-          <a:p>
-            <a:r>
-              <a:rPr lang="en-US" sz="2400" dirty="0">
-                <a:solidFill>
-                  <a:schemeClr val="accent6">
-                    <a:lumMod val="60000"/>
-                    <a:lumOff val="40000"/>
-                  </a:schemeClr>
-                </a:solidFill>
-              </a:rPr>
-              <a:t>A </a:t>
-            </a:r>
-            <a:r>
-              <a:rPr lang="en-US" sz="2400" b="1" dirty="0">
-                <a:solidFill>
-                  <a:schemeClr val="accent6">
-                    <a:lumMod val="60000"/>
-                    <a:lumOff val="40000"/>
-                  </a:schemeClr>
-                </a:solidFill>
-              </a:rPr>
-              <a:t>smaller fine-tuned</a:t>
-            </a:r>
-            <a:r>
-              <a:rPr lang="en-US" sz="2400" dirty="0">
-                <a:solidFill>
-                  <a:schemeClr val="accent6">
-                    <a:lumMod val="60000"/>
-                    <a:lumOff val="40000"/>
-                  </a:schemeClr>
-                </a:solidFill>
-              </a:rPr>
-              <a:t> model can outperform the larger base model</a:t>
-            </a:r>
-          </a:p>
-        </p:txBody>
-      </p:sp>
-      <p:sp>
-        <p:nvSpPr>
-          <p:cNvPr id="7" name="Freeform: Shape 6">
-            <a:extLst>
-              <a:ext uri="{FF2B5EF4-FFF2-40B4-BE49-F238E27FC236}">
-                <a16:creationId xmlns:a16="http://schemas.microsoft.com/office/drawing/2014/main" id="{D5F35BEC-DA0B-C59D-411D-689965933345}"/>
-              </a:ext>
-            </a:extLst>
-          </p:cNvPr>
-          <p:cNvSpPr/>
-          <p:nvPr/>
-        </p:nvSpPr>
-        <p:spPr>
-          <a:xfrm>
-            <a:off x="274320" y="2889504"/>
-            <a:ext cx="4078224" cy="2990088"/>
-          </a:xfrm>
-          <a:custGeom>
-            <a:avLst/>
-            <a:gdLst>
-              <a:gd name="csX0" fmla="*/ 813816 w 1618488"/>
-              <a:gd name="csY0" fmla="*/ 54864 h 1472184"/>
-              <a:gd name="csX1" fmla="*/ 713232 w 1618488"/>
-              <a:gd name="csY1" fmla="*/ 18288 h 1472184"/>
-              <a:gd name="csX2" fmla="*/ 603504 w 1618488"/>
-              <a:gd name="csY2" fmla="*/ 9144 h 1472184"/>
-              <a:gd name="csX3" fmla="*/ 393192 w 1618488"/>
-              <a:gd name="csY3" fmla="*/ 27432 h 1472184"/>
-              <a:gd name="csX4" fmla="*/ 310896 w 1618488"/>
-              <a:gd name="csY4" fmla="*/ 64008 h 1472184"/>
-              <a:gd name="csX5" fmla="*/ 228600 w 1618488"/>
-              <a:gd name="csY5" fmla="*/ 118872 h 1472184"/>
-              <a:gd name="csX6" fmla="*/ 182880 w 1618488"/>
-              <a:gd name="csY6" fmla="*/ 164592 h 1472184"/>
-              <a:gd name="csX7" fmla="*/ 91440 w 1618488"/>
-              <a:gd name="csY7" fmla="*/ 301752 h 1472184"/>
-              <a:gd name="csX8" fmla="*/ 27432 w 1618488"/>
-              <a:gd name="csY8" fmla="*/ 502920 h 1472184"/>
-              <a:gd name="csX9" fmla="*/ 18288 w 1618488"/>
-              <a:gd name="csY9" fmla="*/ 594360 h 1472184"/>
-              <a:gd name="csX10" fmla="*/ 0 w 1618488"/>
-              <a:gd name="csY10" fmla="*/ 841248 h 1472184"/>
-              <a:gd name="csX11" fmla="*/ 36576 w 1618488"/>
-              <a:gd name="csY11" fmla="*/ 1106424 h 1472184"/>
-              <a:gd name="csX12" fmla="*/ 64008 w 1618488"/>
-              <a:gd name="csY12" fmla="*/ 1179576 h 1472184"/>
-              <a:gd name="csX13" fmla="*/ 118872 w 1618488"/>
-              <a:gd name="csY13" fmla="*/ 1243584 h 1472184"/>
-              <a:gd name="csX14" fmla="*/ 283464 w 1618488"/>
-              <a:gd name="csY14" fmla="*/ 1362456 h 1472184"/>
-              <a:gd name="csX15" fmla="*/ 484632 w 1618488"/>
-              <a:gd name="csY15" fmla="*/ 1444752 h 1472184"/>
-              <a:gd name="csX16" fmla="*/ 722376 w 1618488"/>
-              <a:gd name="csY16" fmla="*/ 1472184 h 1472184"/>
-              <a:gd name="csX17" fmla="*/ 877824 w 1618488"/>
-              <a:gd name="csY17" fmla="*/ 1453896 h 1472184"/>
-              <a:gd name="csX18" fmla="*/ 996696 w 1618488"/>
-              <a:gd name="csY18" fmla="*/ 1408176 h 1472184"/>
-              <a:gd name="csX19" fmla="*/ 1051560 w 1618488"/>
-              <a:gd name="csY19" fmla="*/ 1353312 h 1472184"/>
-              <a:gd name="csX20" fmla="*/ 1152144 w 1618488"/>
-              <a:gd name="csY20" fmla="*/ 1271016 h 1472184"/>
-              <a:gd name="csX21" fmla="*/ 1298448 w 1618488"/>
-              <a:gd name="csY21" fmla="*/ 1243584 h 1472184"/>
-              <a:gd name="csX22" fmla="*/ 1490472 w 1618488"/>
-              <a:gd name="csY22" fmla="*/ 1207008 h 1472184"/>
-              <a:gd name="csX23" fmla="*/ 1563624 w 1618488"/>
-              <a:gd name="csY23" fmla="*/ 1152144 h 1472184"/>
-              <a:gd name="csX24" fmla="*/ 1618488 w 1618488"/>
-              <a:gd name="csY24" fmla="*/ 1005840 h 1472184"/>
-              <a:gd name="csX25" fmla="*/ 1572768 w 1618488"/>
-              <a:gd name="csY25" fmla="*/ 877824 h 1472184"/>
-              <a:gd name="csX26" fmla="*/ 1517904 w 1618488"/>
-              <a:gd name="csY26" fmla="*/ 804672 h 1472184"/>
-              <a:gd name="csX27" fmla="*/ 1362456 w 1618488"/>
-              <a:gd name="csY27" fmla="*/ 667512 h 1472184"/>
-              <a:gd name="csX28" fmla="*/ 1289304 w 1618488"/>
-              <a:gd name="csY28" fmla="*/ 603504 h 1472184"/>
-              <a:gd name="csX29" fmla="*/ 1197864 w 1618488"/>
-              <a:gd name="csY29" fmla="*/ 493776 h 1472184"/>
-              <a:gd name="csX30" fmla="*/ 1106424 w 1618488"/>
-              <a:gd name="csY30" fmla="*/ 402336 h 1472184"/>
-              <a:gd name="csX31" fmla="*/ 1088136 w 1618488"/>
-              <a:gd name="csY31" fmla="*/ 356616 h 1472184"/>
-              <a:gd name="csX32" fmla="*/ 1051560 w 1618488"/>
-              <a:gd name="csY32" fmla="*/ 283464 h 1472184"/>
-              <a:gd name="csX33" fmla="*/ 1042416 w 1618488"/>
-              <a:gd name="csY33" fmla="*/ 246888 h 1472184"/>
-              <a:gd name="csX34" fmla="*/ 987552 w 1618488"/>
-              <a:gd name="csY34" fmla="*/ 164592 h 1472184"/>
-              <a:gd name="csX35" fmla="*/ 969264 w 1618488"/>
-              <a:gd name="csY35" fmla="*/ 137160 h 1472184"/>
-              <a:gd name="csX36" fmla="*/ 932688 w 1618488"/>
-              <a:gd name="csY36" fmla="*/ 91440 h 1472184"/>
-              <a:gd name="csX37" fmla="*/ 914400 w 1618488"/>
-              <a:gd name="csY37" fmla="*/ 64008 h 1472184"/>
-              <a:gd name="csX38" fmla="*/ 850392 w 1618488"/>
-              <a:gd name="csY38" fmla="*/ 9144 h 1472184"/>
-              <a:gd name="csX39" fmla="*/ 822960 w 1618488"/>
-              <a:gd name="csY39" fmla="*/ 0 h 1472184"/>
-              <a:gd name="csX40" fmla="*/ 795528 w 1618488"/>
-              <a:gd name="csY40" fmla="*/ 9144 h 1472184"/>
-              <a:gd name="csX41" fmla="*/ 740664 w 1618488"/>
-              <a:gd name="csY41" fmla="*/ 18288 h 1472184"/>
-              <a:gd name="csX42" fmla="*/ 694944 w 1618488"/>
-              <a:gd name="csY42" fmla="*/ 27432 h 1472184"/>
-              <a:gd name="csX43" fmla="*/ 749808 w 1618488"/>
-              <a:gd name="csY43" fmla="*/ 45720 h 1472184"/>
-              <a:gd name="csX44" fmla="*/ 813816 w 1618488"/>
-              <a:gd name="csY44" fmla="*/ 54864 h 1472184"/>
-            </a:gdLst>
-            <a:ahLst/>
-            <a:cxnLst>
-              <a:cxn ang="0">
-                <a:pos x="csX0" y="csY0"/>
-              </a:cxn>
-              <a:cxn ang="0">
-                <a:pos x="csX1" y="csY1"/>
-              </a:cxn>
-              <a:cxn ang="0">
-                <a:pos x="csX2" y="csY2"/>
-              </a:cxn>
-              <a:cxn ang="0">
-                <a:pos x="csX3" y="csY3"/>
-              </a:cxn>
-              <a:cxn ang="0">
-                <a:pos x="csX4" y="csY4"/>
-              </a:cxn>
-              <a:cxn ang="0">
-                <a:pos x="csX5" y="csY5"/>
-              </a:cxn>
-              <a:cxn ang="0">
-                <a:pos x="csX6" y="csY6"/>
-              </a:cxn>
-              <a:cxn ang="0">
-                <a:pos x="csX7" y="csY7"/>
-              </a:cxn>
-              <a:cxn ang="0">
-                <a:pos x="csX8" y="csY8"/>
-              </a:cxn>
-              <a:cxn ang="0">
-                <a:pos x="csX9" y="csY9"/>
-              </a:cxn>
-              <a:cxn ang="0">
-                <a:pos x="csX10" y="csY10"/>
-              </a:cxn>
-              <a:cxn ang="0">
-                <a:pos x="csX11" y="csY11"/>
-              </a:cxn>
-              <a:cxn ang="0">
-                <a:pos x="csX12" y="csY12"/>
-              </a:cxn>
-              <a:cxn ang="0">
-                <a:pos x="csX13" y="csY13"/>
-              </a:cxn>
-              <a:cxn ang="0">
-                <a:pos x="csX14" y="csY14"/>
-              </a:cxn>
-              <a:cxn ang="0">
-                <a:pos x="csX15" y="csY15"/>
-              </a:cxn>
-              <a:cxn ang="0">
-                <a:pos x="csX16" y="csY16"/>
-              </a:cxn>
-              <a:cxn ang="0">
-                <a:pos x="csX17" y="csY17"/>
-              </a:cxn>
-              <a:cxn ang="0">
-                <a:pos x="csX18" y="csY18"/>
-              </a:cxn>
-              <a:cxn ang="0">
-                <a:pos x="csX19" y="csY19"/>
-              </a:cxn>
-              <a:cxn ang="0">
-                <a:pos x="csX20" y="csY20"/>
-              </a:cxn>
-              <a:cxn ang="0">
-                <a:pos x="csX21" y="csY21"/>
-              </a:cxn>
-              <a:cxn ang="0">
-                <a:pos x="csX22" y="csY22"/>
-              </a:cxn>
-              <a:cxn ang="0">
-                <a:pos x="csX23" y="csY23"/>
-              </a:cxn>
-              <a:cxn ang="0">
-                <a:pos x="csX24" y="csY24"/>
-              </a:cxn>
-              <a:cxn ang="0">
-                <a:pos x="csX25" y="csY25"/>
-              </a:cxn>
-              <a:cxn ang="0">
-                <a:pos x="csX26" y="csY26"/>
-              </a:cxn>
-              <a:cxn ang="0">
-                <a:pos x="csX27" y="csY27"/>
-              </a:cxn>
-              <a:cxn ang="0">
-                <a:pos x="csX28" y="csY28"/>
-              </a:cxn>
-              <a:cxn ang="0">
-                <a:pos x="csX29" y="csY29"/>
-              </a:cxn>
-              <a:cxn ang="0">
-                <a:pos x="csX30" y="csY30"/>
-              </a:cxn>
-              <a:cxn ang="0">
-                <a:pos x="csX31" y="csY31"/>
-              </a:cxn>
-              <a:cxn ang="0">
-                <a:pos x="csX32" y="csY32"/>
-              </a:cxn>
-              <a:cxn ang="0">
-                <a:pos x="csX33" y="csY33"/>
-              </a:cxn>
-              <a:cxn ang="0">
-                <a:pos x="csX34" y="csY34"/>
-              </a:cxn>
-              <a:cxn ang="0">
-                <a:pos x="csX35" y="csY35"/>
-              </a:cxn>
-              <a:cxn ang="0">
-                <a:pos x="csX36" y="csY36"/>
-              </a:cxn>
-              <a:cxn ang="0">
-                <a:pos x="csX37" y="csY37"/>
-              </a:cxn>
-              <a:cxn ang="0">
-                <a:pos x="csX38" y="csY38"/>
-              </a:cxn>
-              <a:cxn ang="0">
-                <a:pos x="csX39" y="csY39"/>
-              </a:cxn>
-              <a:cxn ang="0">
-                <a:pos x="csX40" y="csY40"/>
-              </a:cxn>
-              <a:cxn ang="0">
-                <a:pos x="csX41" y="csY41"/>
-              </a:cxn>
-              <a:cxn ang="0">
-                <a:pos x="csX42" y="csY42"/>
-              </a:cxn>
-              <a:cxn ang="0">
-                <a:pos x="csX43" y="csY43"/>
-              </a:cxn>
-              <a:cxn ang="0">
-                <a:pos x="csX44" y="csY44"/>
-              </a:cxn>
-            </a:cxnLst>
-            <a:rect l="l" t="t" r="r" b="b"/>
-            <a:pathLst>
-              <a:path w="1618488" h="1472184">
-                <a:moveTo>
-                  <a:pt x="813816" y="54864"/>
-                </a:moveTo>
-                <a:cubicBezTo>
-                  <a:pt x="807720" y="50292"/>
-                  <a:pt x="733356" y="21642"/>
-                  <a:pt x="713232" y="18288"/>
-                </a:cubicBezTo>
-                <a:cubicBezTo>
-                  <a:pt x="677029" y="12254"/>
-                  <a:pt x="640080" y="12192"/>
-                  <a:pt x="603504" y="9144"/>
-                </a:cubicBezTo>
-                <a:cubicBezTo>
-                  <a:pt x="533400" y="15240"/>
-                  <a:pt x="462355" y="14464"/>
-                  <a:pt x="393192" y="27432"/>
-                </a:cubicBezTo>
-                <a:cubicBezTo>
-                  <a:pt x="363687" y="32964"/>
-                  <a:pt x="337138" y="49429"/>
-                  <a:pt x="310896" y="64008"/>
-                </a:cubicBezTo>
-                <a:cubicBezTo>
-                  <a:pt x="282076" y="80019"/>
-                  <a:pt x="254524" y="98503"/>
-                  <a:pt x="228600" y="118872"/>
-                </a:cubicBezTo>
-                <a:cubicBezTo>
-                  <a:pt x="211653" y="132188"/>
-                  <a:pt x="197378" y="148644"/>
-                  <a:pt x="182880" y="164592"/>
-                </a:cubicBezTo>
-                <a:cubicBezTo>
-                  <a:pt x="139283" y="212548"/>
-                  <a:pt x="119439" y="239531"/>
-                  <a:pt x="91440" y="301752"/>
-                </a:cubicBezTo>
-                <a:cubicBezTo>
-                  <a:pt x="60691" y="370082"/>
-                  <a:pt x="47005" y="431151"/>
-                  <a:pt x="27432" y="502920"/>
-                </a:cubicBezTo>
-                <a:cubicBezTo>
-                  <a:pt x="24384" y="533400"/>
-                  <a:pt x="20396" y="563801"/>
-                  <a:pt x="18288" y="594360"/>
-                </a:cubicBezTo>
-                <a:cubicBezTo>
-                  <a:pt x="628" y="850433"/>
-                  <a:pt x="19398" y="686061"/>
-                  <a:pt x="0" y="841248"/>
-                </a:cubicBezTo>
-                <a:cubicBezTo>
-                  <a:pt x="9630" y="1033853"/>
-                  <a:pt x="-9704" y="975298"/>
-                  <a:pt x="36576" y="1106424"/>
-                </a:cubicBezTo>
-                <a:cubicBezTo>
-                  <a:pt x="45243" y="1130981"/>
-                  <a:pt x="50609" y="1157245"/>
-                  <a:pt x="64008" y="1179576"/>
-                </a:cubicBezTo>
-                <a:cubicBezTo>
-                  <a:pt x="78466" y="1203673"/>
-                  <a:pt x="99001" y="1223713"/>
-                  <a:pt x="118872" y="1243584"/>
-                </a:cubicBezTo>
-                <a:cubicBezTo>
-                  <a:pt x="168419" y="1293131"/>
-                  <a:pt x="219484" y="1332465"/>
-                  <a:pt x="283464" y="1362456"/>
-                </a:cubicBezTo>
-                <a:cubicBezTo>
-                  <a:pt x="349065" y="1393206"/>
-                  <a:pt x="413024" y="1433735"/>
-                  <a:pt x="484632" y="1444752"/>
-                </a:cubicBezTo>
-                <a:cubicBezTo>
-                  <a:pt x="642783" y="1469083"/>
-                  <a:pt x="563532" y="1459965"/>
-                  <a:pt x="722376" y="1472184"/>
-                </a:cubicBezTo>
-                <a:cubicBezTo>
-                  <a:pt x="774192" y="1466088"/>
-                  <a:pt x="826422" y="1462835"/>
-                  <a:pt x="877824" y="1453896"/>
-                </a:cubicBezTo>
-                <a:cubicBezTo>
-                  <a:pt x="906578" y="1448895"/>
-                  <a:pt x="972928" y="1418362"/>
-                  <a:pt x="996696" y="1408176"/>
-                </a:cubicBezTo>
-                <a:cubicBezTo>
-                  <a:pt x="1014984" y="1389888"/>
-                  <a:pt x="1034163" y="1372449"/>
-                  <a:pt x="1051560" y="1353312"/>
-                </a:cubicBezTo>
-                <a:cubicBezTo>
-                  <a:pt x="1091695" y="1309164"/>
-                  <a:pt x="1086039" y="1291135"/>
-                  <a:pt x="1152144" y="1271016"/>
-                </a:cubicBezTo>
-                <a:cubicBezTo>
-                  <a:pt x="1199612" y="1256569"/>
-                  <a:pt x="1249552" y="1252014"/>
-                  <a:pt x="1298448" y="1243584"/>
-                </a:cubicBezTo>
-                <a:cubicBezTo>
-                  <a:pt x="1476555" y="1212876"/>
-                  <a:pt x="1356864" y="1240410"/>
-                  <a:pt x="1490472" y="1207008"/>
-                </a:cubicBezTo>
-                <a:cubicBezTo>
-                  <a:pt x="1514856" y="1188720"/>
-                  <a:pt x="1542950" y="1174541"/>
-                  <a:pt x="1563624" y="1152144"/>
-                </a:cubicBezTo>
-                <a:cubicBezTo>
-                  <a:pt x="1604285" y="1108095"/>
-                  <a:pt x="1606141" y="1061400"/>
-                  <a:pt x="1618488" y="1005840"/>
-                </a:cubicBezTo>
-                <a:cubicBezTo>
-                  <a:pt x="1603248" y="963168"/>
-                  <a:pt x="1593032" y="918352"/>
-                  <a:pt x="1572768" y="877824"/>
-                </a:cubicBezTo>
-                <a:cubicBezTo>
-                  <a:pt x="1559137" y="850562"/>
-                  <a:pt x="1537975" y="827611"/>
-                  <a:pt x="1517904" y="804672"/>
-                </a:cubicBezTo>
-                <a:cubicBezTo>
-                  <a:pt x="1448328" y="725156"/>
-                  <a:pt x="1443603" y="734339"/>
-                  <a:pt x="1362456" y="667512"/>
-                </a:cubicBezTo>
-                <a:cubicBezTo>
-                  <a:pt x="1337445" y="646915"/>
-                  <a:pt x="1313047" y="625551"/>
-                  <a:pt x="1289304" y="603504"/>
-                </a:cubicBezTo>
-                <a:cubicBezTo>
-                  <a:pt x="1142500" y="467186"/>
-                  <a:pt x="1313712" y="626174"/>
-                  <a:pt x="1197864" y="493776"/>
-                </a:cubicBezTo>
-                <a:cubicBezTo>
-                  <a:pt x="1169479" y="461336"/>
-                  <a:pt x="1106424" y="402336"/>
-                  <a:pt x="1106424" y="402336"/>
-                </a:cubicBezTo>
-                <a:cubicBezTo>
-                  <a:pt x="1100328" y="387096"/>
-                  <a:pt x="1095014" y="371519"/>
-                  <a:pt x="1088136" y="356616"/>
-                </a:cubicBezTo>
-                <a:cubicBezTo>
-                  <a:pt x="1076712" y="331863"/>
-                  <a:pt x="1058172" y="309912"/>
-                  <a:pt x="1051560" y="283464"/>
-                </a:cubicBezTo>
-                <a:cubicBezTo>
-                  <a:pt x="1048512" y="271272"/>
-                  <a:pt x="1047520" y="258372"/>
-                  <a:pt x="1042416" y="246888"/>
-                </a:cubicBezTo>
-                <a:cubicBezTo>
-                  <a:pt x="1027866" y="214149"/>
-                  <a:pt x="1007878" y="193049"/>
-                  <a:pt x="987552" y="164592"/>
-                </a:cubicBezTo>
-                <a:cubicBezTo>
-                  <a:pt x="981164" y="155649"/>
-                  <a:pt x="975858" y="145952"/>
-                  <a:pt x="969264" y="137160"/>
-                </a:cubicBezTo>
-                <a:cubicBezTo>
-                  <a:pt x="957554" y="121547"/>
-                  <a:pt x="944398" y="107053"/>
-                  <a:pt x="932688" y="91440"/>
-                </a:cubicBezTo>
-                <a:cubicBezTo>
-                  <a:pt x="926094" y="82648"/>
-                  <a:pt x="921552" y="72352"/>
-                  <a:pt x="914400" y="64008"/>
-                </a:cubicBezTo>
-                <a:cubicBezTo>
-                  <a:pt x="897527" y="44322"/>
-                  <a:pt x="874659" y="21278"/>
-                  <a:pt x="850392" y="9144"/>
-                </a:cubicBezTo>
-                <a:cubicBezTo>
-                  <a:pt x="841771" y="4833"/>
-                  <a:pt x="832104" y="3048"/>
-                  <a:pt x="822960" y="0"/>
-                </a:cubicBezTo>
-                <a:cubicBezTo>
-                  <a:pt x="813816" y="3048"/>
-                  <a:pt x="804937" y="7053"/>
-                  <a:pt x="795528" y="9144"/>
-                </a:cubicBezTo>
-                <a:cubicBezTo>
-                  <a:pt x="777429" y="13166"/>
-                  <a:pt x="758905" y="14971"/>
-                  <a:pt x="740664" y="18288"/>
-                </a:cubicBezTo>
-                <a:cubicBezTo>
-                  <a:pt x="725373" y="21068"/>
-                  <a:pt x="710184" y="24384"/>
-                  <a:pt x="694944" y="27432"/>
-                </a:cubicBezTo>
-                <a:cubicBezTo>
-                  <a:pt x="713232" y="33528"/>
-                  <a:pt x="731106" y="41045"/>
-                  <a:pt x="749808" y="45720"/>
-                </a:cubicBezTo>
-                <a:cubicBezTo>
-                  <a:pt x="792996" y="56517"/>
-                  <a:pt x="819912" y="59436"/>
-                  <a:pt x="813816" y="54864"/>
-                </a:cubicBezTo>
-                <a:close/>
-              </a:path>
-            </a:pathLst>
-          </a:custGeom>
-        </p:spPr>
-        <p:style>
-          <a:lnRef idx="2">
-            <a:schemeClr val="accent1">
-              <a:shade val="15000"/>
-            </a:schemeClr>
-          </a:lnRef>
-          <a:fillRef idx="1">
-            <a:schemeClr val="accent1"/>
-          </a:fillRef>
-          <a:effectRef idx="0">
-            <a:schemeClr val="accent1"/>
-          </a:effectRef>
-          <a:fontRef idx="minor">
-            <a:schemeClr val="lt1"/>
-          </a:fontRef>
-        </p:style>
-        <p:txBody>
-          <a:bodyPr rtlCol="0" anchor="ctr"/>
-          <a:lstStyle/>
-          <a:p>
-            <a:pPr algn="ctr"/>
-            <a:r>
-              <a:rPr lang="en-US" dirty="0"/>
-              <a:t>Base Model</a:t>
-            </a:r>
-          </a:p>
-        </p:txBody>
-      </p:sp>
-      <p:sp>
-        <p:nvSpPr>
-          <p:cNvPr id="3" name="Oval 2">
-            <a:extLst>
-              <a:ext uri="{FF2B5EF4-FFF2-40B4-BE49-F238E27FC236}">
-                <a16:creationId xmlns:a16="http://schemas.microsoft.com/office/drawing/2014/main" id="{DE22D1DF-259E-1CC8-F265-D434060099F8}"/>
-              </a:ext>
-            </a:extLst>
-          </p:cNvPr>
-          <p:cNvSpPr/>
-          <p:nvPr/>
-        </p:nvSpPr>
-        <p:spPr>
-          <a:xfrm>
-            <a:off x="4965192" y="4096512"/>
-            <a:ext cx="3749040" cy="1149516"/>
-          </a:xfrm>
-          <a:prstGeom prst="ellipse">
-            <a:avLst/>
-          </a:prstGeom>
-        </p:spPr>
-        <p:style>
-          <a:lnRef idx="2">
-            <a:schemeClr val="accent1">
-              <a:shade val="15000"/>
-            </a:schemeClr>
-          </a:lnRef>
-          <a:fillRef idx="1">
-            <a:schemeClr val="accent1"/>
-          </a:fillRef>
-          <a:effectRef idx="0">
-            <a:schemeClr val="accent1"/>
-          </a:effectRef>
-          <a:fontRef idx="minor">
-            <a:schemeClr val="lt1"/>
-          </a:fontRef>
-        </p:style>
-        <p:txBody>
-          <a:bodyPr rtlCol="0" anchor="ctr"/>
-          <a:lstStyle/>
-          <a:p>
-            <a:pPr algn="ctr"/>
-            <a:r>
-              <a:rPr lang="en-US" dirty="0"/>
-              <a:t>Fine Tuned Model</a:t>
-            </a:r>
-          </a:p>
-        </p:txBody>
-      </p:sp>
-      <p:grpSp>
-        <p:nvGrpSpPr>
-          <p:cNvPr id="8" name="Group 7">
-            <a:extLst>
-              <a:ext uri="{FF2B5EF4-FFF2-40B4-BE49-F238E27FC236}">
-                <a16:creationId xmlns:a16="http://schemas.microsoft.com/office/drawing/2014/main" id="{33A74F51-6EE3-8480-3F5C-9E35B175339E}"/>
-              </a:ext>
-            </a:extLst>
-          </p:cNvPr>
-          <p:cNvGrpSpPr/>
-          <p:nvPr/>
-        </p:nvGrpSpPr>
-        <p:grpSpPr>
-          <a:xfrm>
-            <a:off x="3675888" y="4279392"/>
-            <a:ext cx="792720" cy="266760"/>
-            <a:chOff x="2910024" y="4399416"/>
-            <a:chExt cx="792720" cy="266760"/>
-          </a:xfrm>
-        </p:grpSpPr>
-        <mc:AlternateContent xmlns:mc="http://schemas.openxmlformats.org/markup-compatibility/2006" xmlns:p14="http://schemas.microsoft.com/office/powerpoint/2010/main">
-          <mc:Choice Requires="p14">
-            <p:contentPart p14:bwMode="auto" r:id="rId2">
-              <p14:nvContentPartPr>
-                <p14:cNvPr id="10" name="Ink 9">
-                  <a:extLst>
-                    <a:ext uri="{FF2B5EF4-FFF2-40B4-BE49-F238E27FC236}">
-                      <a16:creationId xmlns:a16="http://schemas.microsoft.com/office/drawing/2014/main" id="{CCD839BD-4347-462F-AC29-084818E84A94}"/>
-                    </a:ext>
-                  </a:extLst>
-                </p14:cNvPr>
-                <p14:cNvContentPartPr/>
-                <p14:nvPr/>
-              </p14:nvContentPartPr>
-              <p14:xfrm>
-                <a:off x="2910024" y="4525776"/>
-                <a:ext cx="739440" cy="64800"/>
-              </p14:xfrm>
-            </p:contentPart>
-          </mc:Choice>
-          <mc:Fallback xmlns="">
-            <p:pic>
-              <p:nvPicPr>
-                <p:cNvPr id="10" name="Ink 9">
-                  <a:extLst>
-                    <a:ext uri="{FF2B5EF4-FFF2-40B4-BE49-F238E27FC236}">
-                      <a16:creationId xmlns:a16="http://schemas.microsoft.com/office/drawing/2014/main" id="{CCD839BD-4347-462F-AC29-084818E84A94}"/>
-                    </a:ext>
-                  </a:extLst>
-                </p:cNvPr>
-                <p:cNvPicPr/>
-                <p:nvPr/>
-              </p:nvPicPr>
-              <p:blipFill>
-                <a:blip r:embed="rId3"/>
-                <a:stretch>
-                  <a:fillRect/>
-                </a:stretch>
-              </p:blipFill>
-              <p:spPr>
-                <a:xfrm>
-                  <a:off x="2892033" y="4507776"/>
-                  <a:ext cx="775063" cy="100440"/>
-                </a:xfrm>
-                <a:prstGeom prst="rect">
-                  <a:avLst/>
-                </a:prstGeom>
-              </p:spPr>
-            </p:pic>
-          </mc:Fallback>
-        </mc:AlternateContent>
-        <mc:AlternateContent xmlns:mc="http://schemas.openxmlformats.org/markup-compatibility/2006" xmlns:p14="http://schemas.microsoft.com/office/powerpoint/2010/main">
-          <mc:Choice Requires="p14">
-            <p:contentPart p14:bwMode="auto" r:id="rId4">
-              <p14:nvContentPartPr>
-                <p14:cNvPr id="11" name="Ink 10">
-                  <a:extLst>
-                    <a:ext uri="{FF2B5EF4-FFF2-40B4-BE49-F238E27FC236}">
-                      <a16:creationId xmlns:a16="http://schemas.microsoft.com/office/drawing/2014/main" id="{EFE146C4-ADD8-516C-5ED4-9A1E3F3B836A}"/>
-                    </a:ext>
-                  </a:extLst>
-                </p14:cNvPr>
-                <p14:cNvContentPartPr/>
-                <p14:nvPr/>
-              </p14:nvContentPartPr>
-              <p14:xfrm>
-                <a:off x="3521304" y="4399416"/>
-                <a:ext cx="181440" cy="266760"/>
-              </p14:xfrm>
-            </p:contentPart>
-          </mc:Choice>
-          <mc:Fallback xmlns="">
-            <p:pic>
-              <p:nvPicPr>
-                <p:cNvPr id="11" name="Ink 10">
-                  <a:extLst>
-                    <a:ext uri="{FF2B5EF4-FFF2-40B4-BE49-F238E27FC236}">
-                      <a16:creationId xmlns:a16="http://schemas.microsoft.com/office/drawing/2014/main" id="{EFE146C4-ADD8-516C-5ED4-9A1E3F3B836A}"/>
-                    </a:ext>
-                  </a:extLst>
-                </p:cNvPr>
-                <p:cNvPicPr/>
-                <p:nvPr/>
-              </p:nvPicPr>
-              <p:blipFill>
-                <a:blip r:embed="rId5"/>
-                <a:stretch>
-                  <a:fillRect/>
-                </a:stretch>
-              </p:blipFill>
-              <p:spPr>
-                <a:xfrm>
-                  <a:off x="3503304" y="4381392"/>
-                  <a:ext cx="217080" cy="302448"/>
-                </a:xfrm>
-                <a:prstGeom prst="rect">
-                  <a:avLst/>
-                </a:prstGeom>
-              </p:spPr>
-            </p:pic>
-          </mc:Fallback>
-        </mc:AlternateContent>
-      </p:grpSp>
-    </p:spTree>
-    <p:extLst>
-      <p:ext uri="{BB962C8B-B14F-4D97-AF65-F5344CB8AC3E}">
-        <p14:creationId xmlns:p14="http://schemas.microsoft.com/office/powerpoint/2010/main" val="1902430033"/>
       </p:ext>
     </p:extLst>
   </p:cSld>
